--- a/public/lessons/year-6-maths/summer/week-28/interpret-line-graphs/teaching-powerpoint-v1.pptx
+++ b/public/lessons/year-6-maths/summer/week-28/interpret-line-graphs/teaching-powerpoint-v1.pptx
@@ -2,24 +2,24 @@
 <file path=ppt/presentation.xml><?xml version="1.0" encoding="utf-8"?>
 <p:presentation xmlns:p="http://schemas.openxmlformats.org/presentationml/2006/main">
   <p:sldMasterIdLst>
-    <p:sldMasterId xmlns:r="http://schemas.openxmlformats.org/officeDocument/2006/relationships" id="2147483648" r:id="Rec78c72271314926"/>
+    <p:sldMasterId xmlns:r="http://schemas.openxmlformats.org/officeDocument/2006/relationships" id="2147483648" r:id="R664cbf8fbf1042d3"/>
   </p:sldMasterIdLst>
   <p:notesMasterIdLst>
-    <p:notesMasterId xmlns:r="http://schemas.openxmlformats.org/officeDocument/2006/relationships" r:id="Rb780fc7787de4960"/>
+    <p:notesMasterId xmlns:r="http://schemas.openxmlformats.org/officeDocument/2006/relationships" r:id="R8e11f2326bf64d2e"/>
   </p:notesMasterIdLst>
   <p:sldIdLst>
-    <p:sldId xmlns:r="http://schemas.openxmlformats.org/officeDocument/2006/relationships" id="256" r:id="R57e631f9ad4b41a4"/>
-    <p:sldId xmlns:r="http://schemas.openxmlformats.org/officeDocument/2006/relationships" id="257" r:id="Rebf551ee0e6b4f9c"/>
-    <p:sldId xmlns:r="http://schemas.openxmlformats.org/officeDocument/2006/relationships" id="258" r:id="Rb63f3b979ce44d06"/>
-    <p:sldId xmlns:r="http://schemas.openxmlformats.org/officeDocument/2006/relationships" id="259" r:id="R8ff576f692e246b7"/>
-    <p:sldId xmlns:r="http://schemas.openxmlformats.org/officeDocument/2006/relationships" id="260" r:id="R6fd63901d8a54936"/>
-    <p:sldId xmlns:r="http://schemas.openxmlformats.org/officeDocument/2006/relationships" id="261" r:id="Reaa26ff647ed4775"/>
-    <p:sldId xmlns:r="http://schemas.openxmlformats.org/officeDocument/2006/relationships" id="262" r:id="Rbf385bd5cd04426b"/>
-    <p:sldId xmlns:r="http://schemas.openxmlformats.org/officeDocument/2006/relationships" id="263" r:id="R79ecb16a53af4faf"/>
-    <p:sldId xmlns:r="http://schemas.openxmlformats.org/officeDocument/2006/relationships" id="264" r:id="Rae7aaa1e6d474760"/>
-    <p:sldId xmlns:r="http://schemas.openxmlformats.org/officeDocument/2006/relationships" id="265" r:id="R9a2d54079e7f45a5"/>
-    <p:sldId xmlns:r="http://schemas.openxmlformats.org/officeDocument/2006/relationships" id="266" r:id="Rbf85322802274888"/>
-    <p:sldId xmlns:r="http://schemas.openxmlformats.org/officeDocument/2006/relationships" id="267" r:id="R7cf9178f1cb94feb"/>
+    <p:sldId xmlns:r="http://schemas.openxmlformats.org/officeDocument/2006/relationships" id="256" r:id="R295ead274f4e490a"/>
+    <p:sldId xmlns:r="http://schemas.openxmlformats.org/officeDocument/2006/relationships" id="257" r:id="R54250dd6a54c46fc"/>
+    <p:sldId xmlns:r="http://schemas.openxmlformats.org/officeDocument/2006/relationships" id="258" r:id="Rc185eb536f1f4824"/>
+    <p:sldId xmlns:r="http://schemas.openxmlformats.org/officeDocument/2006/relationships" id="259" r:id="R0f159cded1a7439d"/>
+    <p:sldId xmlns:r="http://schemas.openxmlformats.org/officeDocument/2006/relationships" id="260" r:id="R192e4f50a81b42a0"/>
+    <p:sldId xmlns:r="http://schemas.openxmlformats.org/officeDocument/2006/relationships" id="261" r:id="Re39d7ec326c74984"/>
+    <p:sldId xmlns:r="http://schemas.openxmlformats.org/officeDocument/2006/relationships" id="262" r:id="Re7e120652c4a4585"/>
+    <p:sldId xmlns:r="http://schemas.openxmlformats.org/officeDocument/2006/relationships" id="263" r:id="R607a4522acf04a29"/>
+    <p:sldId xmlns:r="http://schemas.openxmlformats.org/officeDocument/2006/relationships" id="264" r:id="Re2ba7a58cc2a45a2"/>
+    <p:sldId xmlns:r="http://schemas.openxmlformats.org/officeDocument/2006/relationships" id="265" r:id="Re45deca5a6734c27"/>
+    <p:sldId xmlns:r="http://schemas.openxmlformats.org/officeDocument/2006/relationships" id="266" r:id="R18c77f58cc9a465b"/>
+    <p:sldId xmlns:r="http://schemas.openxmlformats.org/officeDocument/2006/relationships" id="267" r:id="Rf551a8c1d912461e"/>
   </p:sldIdLst>
   <p:sldSz cx="12192000" cy="6858000"/>
   <p:notesSz cx="6858000" cy="9144000"/>
@@ -873,7 +873,7 @@
           <a:lstStyle xmlns:a="http://schemas.openxmlformats.org/drawingml/2006/main"/>
           <a:p xmlns:a="http://schemas.openxmlformats.org/drawingml/2006/main">
             <a:r>
-              <a:t>I do. Reveal the question, setup and each calculation stage one click at a time. Pupils watch before copying. Model answer: 28.</a:t>
+              <a:t>I do. Reveal the question, then reveal each mathematical change one click at a time. Point to the numbers and operation that changed before moving to the next line. Final answer: 28.</a:t>
             </a:r>
           </a:p>
         </p:txBody>
@@ -1291,7 +1291,7 @@
   </p:cSld>
   <p:clrMap bg1="lt1" tx1="dk1" bg2="lt2" tx2="dk2" accent1="accent1" accent2="accent2" accent3="accent3" accent4="accent4" accent5="accent5" accent6="accent6" hlink="hlink" folHlink="folHlink"/>
   <p:sldLayoutIdLst>
-    <p:sldLayoutId xmlns:r="http://schemas.openxmlformats.org/officeDocument/2006/relationships" id="2147483649" r:id="Ra6320cc4841748c7"/>
+    <p:sldLayoutId xmlns:r="http://schemas.openxmlformats.org/officeDocument/2006/relationships" id="2147483649" r:id="R3dd7717277564a46"/>
   </p:sldLayoutIdLst>
   <p:txStyles>
     <p:titleStyle>
@@ -1842,7 +1842,7 @@
           <p:cNvPr id="12" name="">
             <a:extLst xmlns:a="http://schemas.openxmlformats.org/drawingml/2006/main">
               <a:ext uri="{FF2B5EF4-FFF2-40B4-BE49-F238E27FC236}">
-                <a16:creationId xmlns:a16="http://schemas.microsoft.com/office/drawing/2014/main" id="{A518DA25-B46A-4FB4-ACAD-8D84C3E7B16B}"/>
+                <a16:creationId xmlns:a16="http://schemas.microsoft.com/office/drawing/2014/main" id="{7299D98F-D2DD-4013-9B5B-D81CB095ADD3}"/>
               </a:ext>
             </a:extLst>
           </p:cNvPr>
@@ -1874,7 +1874,7 @@
           <p:cNvPr id="2" name="">
             <a:extLst xmlns:a="http://schemas.openxmlformats.org/drawingml/2006/main">
               <a:ext uri="{FF2B5EF4-FFF2-40B4-BE49-F238E27FC236}">
-                <a16:creationId xmlns:a16="http://schemas.microsoft.com/office/drawing/2014/main" id="{AEAC451F-13C4-4B62-BA84-D825C9C9684D}"/>
+                <a16:creationId xmlns:a16="http://schemas.microsoft.com/office/drawing/2014/main" id="{D56E70AE-FF7E-42AE-8C5B-16B5BFC19B41}"/>
               </a:ext>
             </a:extLst>
           </p:cNvPr>
@@ -1931,7 +1931,7 @@
           <p:cNvPr id="3" name="">
             <a:extLst xmlns:a="http://schemas.openxmlformats.org/drawingml/2006/main">
               <a:ext uri="{FF2B5EF4-FFF2-40B4-BE49-F238E27FC236}">
-                <a16:creationId xmlns:a16="http://schemas.microsoft.com/office/drawing/2014/main" id="{DCE0C97C-1B77-471A-B573-E2C93ACFD78A}"/>
+                <a16:creationId xmlns:a16="http://schemas.microsoft.com/office/drawing/2014/main" id="{FC84A9E6-BABA-4912-AE60-C6E2E667BC49}"/>
               </a:ext>
             </a:extLst>
           </p:cNvPr>
@@ -1965,7 +1965,7 @@
           <p:cNvPr id="4" name="">
             <a:extLst xmlns:a="http://schemas.openxmlformats.org/drawingml/2006/main">
               <a:ext uri="{FF2B5EF4-FFF2-40B4-BE49-F238E27FC236}">
-                <a16:creationId xmlns:a16="http://schemas.microsoft.com/office/drawing/2014/main" id="{05B4EEFC-50C0-4F1C-B8AF-8FFE63694F73}"/>
+                <a16:creationId xmlns:a16="http://schemas.microsoft.com/office/drawing/2014/main" id="{2B29302E-3223-495B-AAA8-BD172D684F73}"/>
               </a:ext>
             </a:extLst>
           </p:cNvPr>
@@ -2022,7 +2022,7 @@
           <p:cNvPr id="5" name="">
             <a:extLst xmlns:a="http://schemas.openxmlformats.org/drawingml/2006/main">
               <a:ext uri="{FF2B5EF4-FFF2-40B4-BE49-F238E27FC236}">
-                <a16:creationId xmlns:a16="http://schemas.microsoft.com/office/drawing/2014/main" id="{80E357FC-2EAF-43E1-82DD-10C6EB0D351C}"/>
+                <a16:creationId xmlns:a16="http://schemas.microsoft.com/office/drawing/2014/main" id="{2A9F419A-E994-45F5-B018-67F2EF82A3F6}"/>
               </a:ext>
             </a:extLst>
           </p:cNvPr>
@@ -2079,7 +2079,7 @@
           <p:cNvPr id="6" name="">
             <a:extLst xmlns:a="http://schemas.openxmlformats.org/drawingml/2006/main">
               <a:ext uri="{FF2B5EF4-FFF2-40B4-BE49-F238E27FC236}">
-                <a16:creationId xmlns:a16="http://schemas.microsoft.com/office/drawing/2014/main" id="{9F3D4BCD-84B8-4C7D-90F5-7A435EB0D900}"/>
+                <a16:creationId xmlns:a16="http://schemas.microsoft.com/office/drawing/2014/main" id="{54CB04AA-A8BD-4742-BAF1-7FB6C067EB9B}"/>
               </a:ext>
             </a:extLst>
           </p:cNvPr>
@@ -2113,7 +2113,7 @@
           <p:cNvPr id="7" name="">
             <a:extLst xmlns:a="http://schemas.openxmlformats.org/drawingml/2006/main">
               <a:ext uri="{FF2B5EF4-FFF2-40B4-BE49-F238E27FC236}">
-                <a16:creationId xmlns:a16="http://schemas.microsoft.com/office/drawing/2014/main" id="{E38B9609-9C6F-4CE0-BB13-E62A794AA451}"/>
+                <a16:creationId xmlns:a16="http://schemas.microsoft.com/office/drawing/2014/main" id="{64863100-34B9-40E9-B03F-B0EA167D73D4}"/>
               </a:ext>
             </a:extLst>
           </p:cNvPr>
@@ -2170,7 +2170,7 @@
           <p:cNvPr id="8" name="">
             <a:extLst xmlns:a="http://schemas.openxmlformats.org/drawingml/2006/main">
               <a:ext uri="{FF2B5EF4-FFF2-40B4-BE49-F238E27FC236}">
-                <a16:creationId xmlns:a16="http://schemas.microsoft.com/office/drawing/2014/main" id="{2EFC1B80-5BAB-4332-969F-064609328A4F}"/>
+                <a16:creationId xmlns:a16="http://schemas.microsoft.com/office/drawing/2014/main" id="{256FADF6-2DC7-4F33-9E0A-DD300A225437}"/>
               </a:ext>
             </a:extLst>
           </p:cNvPr>
@@ -2227,7 +2227,7 @@
           <p:cNvPr id="9" name="">
             <a:extLst xmlns:a="http://schemas.openxmlformats.org/drawingml/2006/main">
               <a:ext uri="{FF2B5EF4-FFF2-40B4-BE49-F238E27FC236}">
-                <a16:creationId xmlns:a16="http://schemas.microsoft.com/office/drawing/2014/main" id="{52871EE6-4E18-4644-B149-B40CB573270D}"/>
+                <a16:creationId xmlns:a16="http://schemas.microsoft.com/office/drawing/2014/main" id="{FB793059-F5E2-4A95-8A75-C087781FFFD5}"/>
               </a:ext>
             </a:extLst>
           </p:cNvPr>
@@ -2284,7 +2284,7 @@
           <p:cNvPr id="10" name="">
             <a:extLst xmlns:a="http://schemas.openxmlformats.org/drawingml/2006/main">
               <a:ext uri="{FF2B5EF4-FFF2-40B4-BE49-F238E27FC236}">
-                <a16:creationId xmlns:a16="http://schemas.microsoft.com/office/drawing/2014/main" id="{290401D6-2DAA-49D5-B715-AC7336407F3F}"/>
+                <a16:creationId xmlns:a16="http://schemas.microsoft.com/office/drawing/2014/main" id="{9186957B-C2C5-46AA-ABB7-63261F20F063}"/>
               </a:ext>
             </a:extLst>
           </p:cNvPr>
@@ -2341,7 +2341,7 @@
           <p:cNvPr id="11" name="">
             <a:extLst xmlns:a="http://schemas.openxmlformats.org/drawingml/2006/main">
               <a:ext uri="{FF2B5EF4-FFF2-40B4-BE49-F238E27FC236}">
-                <a16:creationId xmlns:a16="http://schemas.microsoft.com/office/drawing/2014/main" id="{F38711DC-0A3A-4591-AA8A-ACCF19638396}"/>
+                <a16:creationId xmlns:a16="http://schemas.microsoft.com/office/drawing/2014/main" id="{243A8D23-F37D-46C3-9277-BF42FFB72A18}"/>
               </a:ext>
             </a:extLst>
           </p:cNvPr>
@@ -2396,7 +2396,7 @@
     </p:spTree>
     <p:extLst>
       <p:ext uri="{BB962C8B-B14F-4D97-AF65-F5344CB8AC3E}">
-        <p14:creationId xmlns:p14="http://schemas.microsoft.com/office/powerpoint/2010/main" val="1289992590"/>
+        <p14:creationId xmlns:p14="http://schemas.microsoft.com/office/powerpoint/2010/main" val="439326176"/>
       </p:ext>
     </p:extLst>
   </p:cSld>
@@ -2427,7 +2427,7 @@
           <p:cNvPr id="14" name="">
             <a:extLst xmlns:a="http://schemas.openxmlformats.org/drawingml/2006/main">
               <a:ext uri="{FF2B5EF4-FFF2-40B4-BE49-F238E27FC236}">
-                <a16:creationId xmlns:a16="http://schemas.microsoft.com/office/drawing/2014/main" id="{18B9DAD3-6458-478F-A4A7-3FF6C9BAAC3A}"/>
+                <a16:creationId xmlns:a16="http://schemas.microsoft.com/office/drawing/2014/main" id="{BEA5551A-F6BF-4AEA-9015-E8943089BAEA}"/>
               </a:ext>
             </a:extLst>
           </p:cNvPr>
@@ -2459,7 +2459,7 @@
           <p:cNvPr id="2" name="">
             <a:extLst xmlns:a="http://schemas.openxmlformats.org/drawingml/2006/main">
               <a:ext uri="{FF2B5EF4-FFF2-40B4-BE49-F238E27FC236}">
-                <a16:creationId xmlns:a16="http://schemas.microsoft.com/office/drawing/2014/main" id="{DE5A8E52-FA6F-4DE2-9604-3B8ADF00CAF9}"/>
+                <a16:creationId xmlns:a16="http://schemas.microsoft.com/office/drawing/2014/main" id="{AAB3A04A-4C73-4E5F-9E84-DF65FA7A0D6B}"/>
               </a:ext>
             </a:extLst>
           </p:cNvPr>
@@ -2516,7 +2516,7 @@
           <p:cNvPr id="3" name="">
             <a:extLst xmlns:a="http://schemas.openxmlformats.org/drawingml/2006/main">
               <a:ext uri="{FF2B5EF4-FFF2-40B4-BE49-F238E27FC236}">
-                <a16:creationId xmlns:a16="http://schemas.microsoft.com/office/drawing/2014/main" id="{6BC931C0-4E87-4EB3-9BD2-8DA99BB47D95}"/>
+                <a16:creationId xmlns:a16="http://schemas.microsoft.com/office/drawing/2014/main" id="{50322B01-4473-4C1B-B505-BA27B31279FC}"/>
               </a:ext>
             </a:extLst>
           </p:cNvPr>
@@ -2548,7 +2548,7 @@
           <p:cNvPr id="4" name="">
             <a:extLst xmlns:a="http://schemas.openxmlformats.org/drawingml/2006/main">
               <a:ext uri="{FF2B5EF4-FFF2-40B4-BE49-F238E27FC236}">
-                <a16:creationId xmlns:a16="http://schemas.microsoft.com/office/drawing/2014/main" id="{6CA48CB4-3200-4196-AA5E-24C99801B8CA}"/>
+                <a16:creationId xmlns:a16="http://schemas.microsoft.com/office/drawing/2014/main" id="{863420CB-80FE-41B0-B6AB-0D62C85A1558}"/>
               </a:ext>
             </a:extLst>
           </p:cNvPr>
@@ -2605,7 +2605,7 @@
           <p:cNvPr id="5" name="">
             <a:extLst xmlns:a="http://schemas.openxmlformats.org/drawingml/2006/main">
               <a:ext uri="{FF2B5EF4-FFF2-40B4-BE49-F238E27FC236}">
-                <a16:creationId xmlns:a16="http://schemas.microsoft.com/office/drawing/2014/main" id="{D977328C-E85B-4290-AF45-ED8B305783D8}"/>
+                <a16:creationId xmlns:a16="http://schemas.microsoft.com/office/drawing/2014/main" id="{A8EABE9D-9057-4C35-8D9E-F17B29ECC0A5}"/>
               </a:ext>
             </a:extLst>
           </p:cNvPr>
@@ -2662,7 +2662,7 @@
           <p:cNvPr id="6" name="">
             <a:extLst xmlns:a="http://schemas.openxmlformats.org/drawingml/2006/main">
               <a:ext uri="{FF2B5EF4-FFF2-40B4-BE49-F238E27FC236}">
-                <a16:creationId xmlns:a16="http://schemas.microsoft.com/office/drawing/2014/main" id="{43018376-E663-4F48-A9F1-006ABC88B735}"/>
+                <a16:creationId xmlns:a16="http://schemas.microsoft.com/office/drawing/2014/main" id="{967C1097-3A36-4B5C-9A89-CE338ACBCE53}"/>
               </a:ext>
             </a:extLst>
           </p:cNvPr>
@@ -2719,7 +2719,7 @@
           <p:cNvPr id="7" name="">
             <a:extLst xmlns:a="http://schemas.openxmlformats.org/drawingml/2006/main">
               <a:ext uri="{FF2B5EF4-FFF2-40B4-BE49-F238E27FC236}">
-                <a16:creationId xmlns:a16="http://schemas.microsoft.com/office/drawing/2014/main" id="{DDC82DCD-21DF-4815-8DA7-5CA77D5EDA67}"/>
+                <a16:creationId xmlns:a16="http://schemas.microsoft.com/office/drawing/2014/main" id="{341E4F1B-BB12-4CE1-AA3E-199A63B40952}"/>
               </a:ext>
             </a:extLst>
           </p:cNvPr>
@@ -2751,7 +2751,7 @@
           <p:cNvPr id="8" name="">
             <a:extLst xmlns:a="http://schemas.openxmlformats.org/drawingml/2006/main">
               <a:ext uri="{FF2B5EF4-FFF2-40B4-BE49-F238E27FC236}">
-                <a16:creationId xmlns:a16="http://schemas.microsoft.com/office/drawing/2014/main" id="{3DE614FF-0202-423D-8D46-921ECE1EF5D9}"/>
+                <a16:creationId xmlns:a16="http://schemas.microsoft.com/office/drawing/2014/main" id="{07CC2C41-60B4-4B62-AD60-002AA296F56D}"/>
               </a:ext>
             </a:extLst>
           </p:cNvPr>
@@ -2808,7 +2808,7 @@
           <p:cNvPr id="9" name="">
             <a:extLst xmlns:a="http://schemas.openxmlformats.org/drawingml/2006/main">
               <a:ext uri="{FF2B5EF4-FFF2-40B4-BE49-F238E27FC236}">
-                <a16:creationId xmlns:a16="http://schemas.microsoft.com/office/drawing/2014/main" id="{804CE802-0A85-4607-AE28-C7C2F90A167D}"/>
+                <a16:creationId xmlns:a16="http://schemas.microsoft.com/office/drawing/2014/main" id="{02F77ECE-819F-46DB-9A35-01F6D3A6294C}"/>
               </a:ext>
             </a:extLst>
           </p:cNvPr>
@@ -2865,7 +2865,7 @@
           <p:cNvPr id="10" name="">
             <a:extLst xmlns:a="http://schemas.openxmlformats.org/drawingml/2006/main">
               <a:ext uri="{FF2B5EF4-FFF2-40B4-BE49-F238E27FC236}">
-                <a16:creationId xmlns:a16="http://schemas.microsoft.com/office/drawing/2014/main" id="{D391DDFF-6AD6-44D4-A962-838B49F651A9}"/>
+                <a16:creationId xmlns:a16="http://schemas.microsoft.com/office/drawing/2014/main" id="{5FB391B0-370A-4A36-91BD-3A5BA25D3538}"/>
               </a:ext>
             </a:extLst>
           </p:cNvPr>
@@ -2922,7 +2922,7 @@
           <p:cNvPr id="11" name="">
             <a:extLst xmlns:a="http://schemas.openxmlformats.org/drawingml/2006/main">
               <a:ext uri="{FF2B5EF4-FFF2-40B4-BE49-F238E27FC236}">
-                <a16:creationId xmlns:a16="http://schemas.microsoft.com/office/drawing/2014/main" id="{D465F611-66DA-4B58-B76A-8E813B9C3563}"/>
+                <a16:creationId xmlns:a16="http://schemas.microsoft.com/office/drawing/2014/main" id="{ECB7CB1B-D893-42F2-92E4-B1DB4662DB93}"/>
               </a:ext>
             </a:extLst>
           </p:cNvPr>
@@ -2979,7 +2979,7 @@
           <p:cNvPr id="12" name="">
             <a:extLst xmlns:a="http://schemas.openxmlformats.org/drawingml/2006/main">
               <a:ext uri="{FF2B5EF4-FFF2-40B4-BE49-F238E27FC236}">
-                <a16:creationId xmlns:a16="http://schemas.microsoft.com/office/drawing/2014/main" id="{2897A71E-9B5F-45B7-A920-B8647502E451}"/>
+                <a16:creationId xmlns:a16="http://schemas.microsoft.com/office/drawing/2014/main" id="{28F6EB23-AAFD-4D04-A821-559607A7CB51}"/>
               </a:ext>
             </a:extLst>
           </p:cNvPr>
@@ -3036,7 +3036,7 @@
           <p:cNvPr id="13" name="">
             <a:extLst xmlns:a="http://schemas.openxmlformats.org/drawingml/2006/main">
               <a:ext uri="{FF2B5EF4-FFF2-40B4-BE49-F238E27FC236}">
-                <a16:creationId xmlns:a16="http://schemas.microsoft.com/office/drawing/2014/main" id="{15C5FF2C-DCDB-4B61-AE9D-86526B1C1E68}"/>
+                <a16:creationId xmlns:a16="http://schemas.microsoft.com/office/drawing/2014/main" id="{54D4EE6D-D135-491E-8071-3832A2B086DD}"/>
               </a:ext>
             </a:extLst>
           </p:cNvPr>
@@ -3091,7 +3091,7 @@
     </p:spTree>
     <p:extLst>
       <p:ext uri="{BB962C8B-B14F-4D97-AF65-F5344CB8AC3E}">
-        <p14:creationId xmlns:p14="http://schemas.microsoft.com/office/powerpoint/2010/main" val="646489313"/>
+        <p14:creationId xmlns:p14="http://schemas.microsoft.com/office/powerpoint/2010/main" val="657521729"/>
       </p:ext>
     </p:extLst>
   </p:cSld>
@@ -3292,7 +3292,7 @@
           <p:cNvPr id="19" name="">
             <a:extLst xmlns:a="http://schemas.openxmlformats.org/drawingml/2006/main">
               <a:ext uri="{FF2B5EF4-FFF2-40B4-BE49-F238E27FC236}">
-                <a16:creationId xmlns:a16="http://schemas.microsoft.com/office/drawing/2014/main" id="{60C70EBF-F361-4A7E-A73B-ECC96939AC17}"/>
+                <a16:creationId xmlns:a16="http://schemas.microsoft.com/office/drawing/2014/main" id="{D7778F41-085B-47BF-AABD-90522EBF2A20}"/>
               </a:ext>
             </a:extLst>
           </p:cNvPr>
@@ -3324,7 +3324,7 @@
           <p:cNvPr id="2" name="">
             <a:extLst xmlns:a="http://schemas.openxmlformats.org/drawingml/2006/main">
               <a:ext uri="{FF2B5EF4-FFF2-40B4-BE49-F238E27FC236}">
-                <a16:creationId xmlns:a16="http://schemas.microsoft.com/office/drawing/2014/main" id="{753F731D-4C77-4FA4-B701-F78643EE226B}"/>
+                <a16:creationId xmlns:a16="http://schemas.microsoft.com/office/drawing/2014/main" id="{1A69F850-CAA0-46CD-9B9A-BD9CC6FCDEC1}"/>
               </a:ext>
             </a:extLst>
           </p:cNvPr>
@@ -3381,7 +3381,7 @@
           <p:cNvPr id="3" name="">
             <a:extLst xmlns:a="http://schemas.openxmlformats.org/drawingml/2006/main">
               <a:ext uri="{FF2B5EF4-FFF2-40B4-BE49-F238E27FC236}">
-                <a16:creationId xmlns:a16="http://schemas.microsoft.com/office/drawing/2014/main" id="{2F4CA4FD-1FD6-463A-85DF-53A8EB31ADF2}"/>
+                <a16:creationId xmlns:a16="http://schemas.microsoft.com/office/drawing/2014/main" id="{CE524F8A-B8CC-4304-A752-1CE636AEE1F1}"/>
               </a:ext>
             </a:extLst>
           </p:cNvPr>
@@ -3413,7 +3413,7 @@
           <p:cNvPr id="4" name="">
             <a:extLst xmlns:a="http://schemas.openxmlformats.org/drawingml/2006/main">
               <a:ext uri="{FF2B5EF4-FFF2-40B4-BE49-F238E27FC236}">
-                <a16:creationId xmlns:a16="http://schemas.microsoft.com/office/drawing/2014/main" id="{6417B570-497B-44B8-AC05-251D3F1CA66F}"/>
+                <a16:creationId xmlns:a16="http://schemas.microsoft.com/office/drawing/2014/main" id="{4CD00293-F33C-4AF5-B3DD-174EC9DD8456}"/>
               </a:ext>
             </a:extLst>
           </p:cNvPr>
@@ -3470,7 +3470,7 @@
           <p:cNvPr id="5" name="">
             <a:extLst xmlns:a="http://schemas.openxmlformats.org/drawingml/2006/main">
               <a:ext uri="{FF2B5EF4-FFF2-40B4-BE49-F238E27FC236}">
-                <a16:creationId xmlns:a16="http://schemas.microsoft.com/office/drawing/2014/main" id="{4307C6E3-CFB2-49E5-8B12-4ADABBB0CFB9}"/>
+                <a16:creationId xmlns:a16="http://schemas.microsoft.com/office/drawing/2014/main" id="{0869547F-F597-4932-BB71-4FFE61EA553C}"/>
               </a:ext>
             </a:extLst>
           </p:cNvPr>
@@ -3527,7 +3527,7 @@
           <p:cNvPr id="6" name="">
             <a:extLst xmlns:a="http://schemas.openxmlformats.org/drawingml/2006/main">
               <a:ext uri="{FF2B5EF4-FFF2-40B4-BE49-F238E27FC236}">
-                <a16:creationId xmlns:a16="http://schemas.microsoft.com/office/drawing/2014/main" id="{259C7C81-F144-4B32-A81C-4233F69CCCF5}"/>
+                <a16:creationId xmlns:a16="http://schemas.microsoft.com/office/drawing/2014/main" id="{E8B4B004-C196-4AEA-A250-8BA1A99297A9}"/>
               </a:ext>
             </a:extLst>
           </p:cNvPr>
@@ -3584,7 +3584,7 @@
           <p:cNvPr id="7" name="">
             <a:extLst xmlns:a="http://schemas.openxmlformats.org/drawingml/2006/main">
               <a:ext uri="{FF2B5EF4-FFF2-40B4-BE49-F238E27FC236}">
-                <a16:creationId xmlns:a16="http://schemas.microsoft.com/office/drawing/2014/main" id="{B65B83FC-4F14-45E8-B2FA-26A226905CC5}"/>
+                <a16:creationId xmlns:a16="http://schemas.microsoft.com/office/drawing/2014/main" id="{36BA4649-20CB-4E55-A16F-BE7E6767F73C}"/>
               </a:ext>
             </a:extLst>
           </p:cNvPr>
@@ -3616,7 +3616,7 @@
           <p:cNvPr id="8" name="">
             <a:extLst xmlns:a="http://schemas.openxmlformats.org/drawingml/2006/main">
               <a:ext uri="{FF2B5EF4-FFF2-40B4-BE49-F238E27FC236}">
-                <a16:creationId xmlns:a16="http://schemas.microsoft.com/office/drawing/2014/main" id="{3E15A3E1-B700-40E9-AF47-0D2DDB100A3F}"/>
+                <a16:creationId xmlns:a16="http://schemas.microsoft.com/office/drawing/2014/main" id="{E42D2F4D-29CF-4BFE-A280-B17FF261EA97}"/>
               </a:ext>
             </a:extLst>
           </p:cNvPr>
@@ -3673,7 +3673,7 @@
           <p:cNvPr id="9" name="">
             <a:extLst xmlns:a="http://schemas.openxmlformats.org/drawingml/2006/main">
               <a:ext uri="{FF2B5EF4-FFF2-40B4-BE49-F238E27FC236}">
-                <a16:creationId xmlns:a16="http://schemas.microsoft.com/office/drawing/2014/main" id="{9E610E9A-6C4A-44EE-B134-645820951281}"/>
+                <a16:creationId xmlns:a16="http://schemas.microsoft.com/office/drawing/2014/main" id="{21BCD707-2804-4B10-AD71-6ED94482F191}"/>
               </a:ext>
             </a:extLst>
           </p:cNvPr>
@@ -3730,7 +3730,7 @@
           <p:cNvPr id="10" name="">
             <a:extLst xmlns:a="http://schemas.openxmlformats.org/drawingml/2006/main">
               <a:ext uri="{FF2B5EF4-FFF2-40B4-BE49-F238E27FC236}">
-                <a16:creationId xmlns:a16="http://schemas.microsoft.com/office/drawing/2014/main" id="{5C854BD9-4BE1-4BC0-96EA-9C253A3B951C}"/>
+                <a16:creationId xmlns:a16="http://schemas.microsoft.com/office/drawing/2014/main" id="{441CEA39-73D7-4F5F-B2C3-C8B6D3246E9D}"/>
               </a:ext>
             </a:extLst>
           </p:cNvPr>
@@ -3787,7 +3787,7 @@
           <p:cNvPr id="11" name="">
             <a:extLst xmlns:a="http://schemas.openxmlformats.org/drawingml/2006/main">
               <a:ext uri="{FF2B5EF4-FFF2-40B4-BE49-F238E27FC236}">
-                <a16:creationId xmlns:a16="http://schemas.microsoft.com/office/drawing/2014/main" id="{7CFF8635-C93A-44F2-95F2-88119C3C5D91}"/>
+                <a16:creationId xmlns:a16="http://schemas.microsoft.com/office/drawing/2014/main" id="{38685374-8BBF-43D6-86F5-4697F8E70B6E}"/>
               </a:ext>
             </a:extLst>
           </p:cNvPr>
@@ -3821,7 +3821,7 @@
           <p:cNvPr id="12" name="">
             <a:extLst xmlns:a="http://schemas.openxmlformats.org/drawingml/2006/main">
               <a:ext uri="{FF2B5EF4-FFF2-40B4-BE49-F238E27FC236}">
-                <a16:creationId xmlns:a16="http://schemas.microsoft.com/office/drawing/2014/main" id="{11C89EEB-94C3-4981-9B93-B790FFB37762}"/>
+                <a16:creationId xmlns:a16="http://schemas.microsoft.com/office/drawing/2014/main" id="{6A288B15-D82A-4EFA-8B7D-35C2E688F392}"/>
               </a:ext>
             </a:extLst>
           </p:cNvPr>
@@ -3878,7 +3878,7 @@
           <p:cNvPr id="13" name="">
             <a:extLst xmlns:a="http://schemas.openxmlformats.org/drawingml/2006/main">
               <a:ext uri="{FF2B5EF4-FFF2-40B4-BE49-F238E27FC236}">
-                <a16:creationId xmlns:a16="http://schemas.microsoft.com/office/drawing/2014/main" id="{7E2EB2AD-A01E-4651-BDAB-9C4E2C0E44F5}"/>
+                <a16:creationId xmlns:a16="http://schemas.microsoft.com/office/drawing/2014/main" id="{31AD825D-1347-4E3A-9EB7-9F8AD32D96AA}"/>
               </a:ext>
             </a:extLst>
           </p:cNvPr>
@@ -3935,7 +3935,7 @@
           <p:cNvPr id="14" name="">
             <a:extLst xmlns:a="http://schemas.openxmlformats.org/drawingml/2006/main">
               <a:ext uri="{FF2B5EF4-FFF2-40B4-BE49-F238E27FC236}">
-                <a16:creationId xmlns:a16="http://schemas.microsoft.com/office/drawing/2014/main" id="{5FB063D2-5E74-42E4-A33B-5A2D33D14BE8}"/>
+                <a16:creationId xmlns:a16="http://schemas.microsoft.com/office/drawing/2014/main" id="{0F22CB80-E77D-4D54-BF93-C6225BA10738}"/>
               </a:ext>
             </a:extLst>
           </p:cNvPr>
@@ -3992,7 +3992,7 @@
           <p:cNvPr id="15" name="">
             <a:extLst xmlns:a="http://schemas.openxmlformats.org/drawingml/2006/main">
               <a:ext uri="{FF2B5EF4-FFF2-40B4-BE49-F238E27FC236}">
-                <a16:creationId xmlns:a16="http://schemas.microsoft.com/office/drawing/2014/main" id="{DF0A35C8-01BD-4CF6-A581-A68664AC2274}"/>
+                <a16:creationId xmlns:a16="http://schemas.microsoft.com/office/drawing/2014/main" id="{C21DB2ED-C241-4B88-8F09-5B44B08B43DA}"/>
               </a:ext>
             </a:extLst>
           </p:cNvPr>
@@ -4026,7 +4026,7 @@
           <p:cNvPr id="16" name="">
             <a:extLst xmlns:a="http://schemas.openxmlformats.org/drawingml/2006/main">
               <a:ext uri="{FF2B5EF4-FFF2-40B4-BE49-F238E27FC236}">
-                <a16:creationId xmlns:a16="http://schemas.microsoft.com/office/drawing/2014/main" id="{010CB374-A8D0-447C-860B-E760EC7ADC31}"/>
+                <a16:creationId xmlns:a16="http://schemas.microsoft.com/office/drawing/2014/main" id="{5CE8CCBB-F74D-4EE3-B02B-FF1DA9162845}"/>
               </a:ext>
             </a:extLst>
           </p:cNvPr>
@@ -4083,7 +4083,7 @@
           <p:cNvPr id="17" name="">
             <a:extLst xmlns:a="http://schemas.openxmlformats.org/drawingml/2006/main">
               <a:ext uri="{FF2B5EF4-FFF2-40B4-BE49-F238E27FC236}">
-                <a16:creationId xmlns:a16="http://schemas.microsoft.com/office/drawing/2014/main" id="{109A58C1-0FFD-4137-8AFD-F8978E0EADE2}"/>
+                <a16:creationId xmlns:a16="http://schemas.microsoft.com/office/drawing/2014/main" id="{B99688F8-4BA9-44A6-B1C3-BADDF7CDBA0F}"/>
               </a:ext>
             </a:extLst>
           </p:cNvPr>
@@ -4140,7 +4140,7 @@
           <p:cNvPr id="18" name="">
             <a:extLst xmlns:a="http://schemas.openxmlformats.org/drawingml/2006/main">
               <a:ext uri="{FF2B5EF4-FFF2-40B4-BE49-F238E27FC236}">
-                <a16:creationId xmlns:a16="http://schemas.microsoft.com/office/drawing/2014/main" id="{C78FADE0-8F0C-4DE0-990E-D630FEC78E7F}"/>
+                <a16:creationId xmlns:a16="http://schemas.microsoft.com/office/drawing/2014/main" id="{1B45FDE6-1FA8-409E-8DF5-1BDC387E559B}"/>
               </a:ext>
             </a:extLst>
           </p:cNvPr>
@@ -4195,7 +4195,7 @@
     </p:spTree>
     <p:extLst>
       <p:ext uri="{BB962C8B-B14F-4D97-AF65-F5344CB8AC3E}">
-        <p14:creationId xmlns:p14="http://schemas.microsoft.com/office/powerpoint/2010/main" val="1032030298"/>
+        <p14:creationId xmlns:p14="http://schemas.microsoft.com/office/powerpoint/2010/main" val="620216488"/>
       </p:ext>
     </p:extLst>
   </p:cSld>
@@ -4350,7 +4350,7 @@
           <p:cNvPr id="23" name="">
             <a:extLst xmlns:a="http://schemas.openxmlformats.org/drawingml/2006/main">
               <a:ext uri="{FF2B5EF4-FFF2-40B4-BE49-F238E27FC236}">
-                <a16:creationId xmlns:a16="http://schemas.microsoft.com/office/drawing/2014/main" id="{36B170E7-38CF-4856-8540-BF4B08E4C940}"/>
+                <a16:creationId xmlns:a16="http://schemas.microsoft.com/office/drawing/2014/main" id="{650838F0-FF23-45F2-A70D-275C776D772D}"/>
               </a:ext>
             </a:extLst>
           </p:cNvPr>
@@ -4382,7 +4382,7 @@
           <p:cNvPr id="2" name="">
             <a:extLst xmlns:a="http://schemas.openxmlformats.org/drawingml/2006/main">
               <a:ext uri="{FF2B5EF4-FFF2-40B4-BE49-F238E27FC236}">
-                <a16:creationId xmlns:a16="http://schemas.microsoft.com/office/drawing/2014/main" id="{05FA2530-9695-452D-8C06-9EFB24F33264}"/>
+                <a16:creationId xmlns:a16="http://schemas.microsoft.com/office/drawing/2014/main" id="{68672B89-08CF-4C16-958B-11D28FA84B13}"/>
               </a:ext>
             </a:extLst>
           </p:cNvPr>
@@ -4439,7 +4439,7 @@
           <p:cNvPr id="3" name="">
             <a:extLst xmlns:a="http://schemas.openxmlformats.org/drawingml/2006/main">
               <a:ext uri="{FF2B5EF4-FFF2-40B4-BE49-F238E27FC236}">
-                <a16:creationId xmlns:a16="http://schemas.microsoft.com/office/drawing/2014/main" id="{60EBE16E-A50B-4934-AC11-3357EED4639C}"/>
+                <a16:creationId xmlns:a16="http://schemas.microsoft.com/office/drawing/2014/main" id="{36CB0649-7176-47CC-9860-8F5AF0977FB5}"/>
               </a:ext>
             </a:extLst>
           </p:cNvPr>
@@ -4471,7 +4471,7 @@
           <p:cNvPr id="4" name="">
             <a:extLst xmlns:a="http://schemas.openxmlformats.org/drawingml/2006/main">
               <a:ext uri="{FF2B5EF4-FFF2-40B4-BE49-F238E27FC236}">
-                <a16:creationId xmlns:a16="http://schemas.microsoft.com/office/drawing/2014/main" id="{1B0F783D-0174-4097-B936-3E3EF6631227}"/>
+                <a16:creationId xmlns:a16="http://schemas.microsoft.com/office/drawing/2014/main" id="{32440847-E93E-42CB-A005-79EBF76F62B8}"/>
               </a:ext>
             </a:extLst>
           </p:cNvPr>
@@ -4528,7 +4528,7 @@
           <p:cNvPr id="5" name="">
             <a:extLst xmlns:a="http://schemas.openxmlformats.org/drawingml/2006/main">
               <a:ext uri="{FF2B5EF4-FFF2-40B4-BE49-F238E27FC236}">
-                <a16:creationId xmlns:a16="http://schemas.microsoft.com/office/drawing/2014/main" id="{81FF75A4-4081-4BE7-AA47-1AD7C9C9DCAA}"/>
+                <a16:creationId xmlns:a16="http://schemas.microsoft.com/office/drawing/2014/main" id="{10291F04-41A5-463F-9C56-69E5A95CF1D2}"/>
               </a:ext>
             </a:extLst>
           </p:cNvPr>
@@ -4585,7 +4585,7 @@
           <p:cNvPr id="6" name="">
             <a:extLst xmlns:a="http://schemas.openxmlformats.org/drawingml/2006/main">
               <a:ext uri="{FF2B5EF4-FFF2-40B4-BE49-F238E27FC236}">
-                <a16:creationId xmlns:a16="http://schemas.microsoft.com/office/drawing/2014/main" id="{4129E8BB-6278-4017-98B3-C96C0821433F}"/>
+                <a16:creationId xmlns:a16="http://schemas.microsoft.com/office/drawing/2014/main" id="{9B7E895D-9542-4FDE-94C0-8D7E76B85FB2}"/>
               </a:ext>
             </a:extLst>
           </p:cNvPr>
@@ -4642,7 +4642,7 @@
           <p:cNvPr id="7" name="">
             <a:extLst xmlns:a="http://schemas.openxmlformats.org/drawingml/2006/main">
               <a:ext uri="{FF2B5EF4-FFF2-40B4-BE49-F238E27FC236}">
-                <a16:creationId xmlns:a16="http://schemas.microsoft.com/office/drawing/2014/main" id="{E7ADE60C-CA7F-4532-8E1A-FD779C883E91}"/>
+                <a16:creationId xmlns:a16="http://schemas.microsoft.com/office/drawing/2014/main" id="{6B810029-7311-47EB-BDA7-3A18AC080A06}"/>
               </a:ext>
             </a:extLst>
           </p:cNvPr>
@@ -4674,7 +4674,7 @@
           <p:cNvPr id="8" name="">
             <a:extLst xmlns:a="http://schemas.openxmlformats.org/drawingml/2006/main">
               <a:ext uri="{FF2B5EF4-FFF2-40B4-BE49-F238E27FC236}">
-                <a16:creationId xmlns:a16="http://schemas.microsoft.com/office/drawing/2014/main" id="{FC20D222-997B-49A2-92B6-2D82B394C34D}"/>
+                <a16:creationId xmlns:a16="http://schemas.microsoft.com/office/drawing/2014/main" id="{795D7C66-67D6-49F6-A912-5B53E65F4DDB}"/>
               </a:ext>
             </a:extLst>
           </p:cNvPr>
@@ -4731,7 +4731,7 @@
           <p:cNvPr id="9" name="">
             <a:extLst xmlns:a="http://schemas.openxmlformats.org/drawingml/2006/main">
               <a:ext uri="{FF2B5EF4-FFF2-40B4-BE49-F238E27FC236}">
-                <a16:creationId xmlns:a16="http://schemas.microsoft.com/office/drawing/2014/main" id="{26A25303-FF0F-41F9-8897-3D743618A588}"/>
+                <a16:creationId xmlns:a16="http://schemas.microsoft.com/office/drawing/2014/main" id="{BE3ECBDB-6060-4038-A856-51816F718AE2}"/>
               </a:ext>
             </a:extLst>
           </p:cNvPr>
@@ -4788,7 +4788,7 @@
           <p:cNvPr id="10" name="">
             <a:extLst xmlns:a="http://schemas.openxmlformats.org/drawingml/2006/main">
               <a:ext uri="{FF2B5EF4-FFF2-40B4-BE49-F238E27FC236}">
-                <a16:creationId xmlns:a16="http://schemas.microsoft.com/office/drawing/2014/main" id="{35B99DDF-AED4-4D4F-96B3-85B05C2DD819}"/>
+                <a16:creationId xmlns:a16="http://schemas.microsoft.com/office/drawing/2014/main" id="{2C83262D-4857-4424-8C43-35547771B51B}"/>
               </a:ext>
             </a:extLst>
           </p:cNvPr>
@@ -4822,7 +4822,7 @@
           <p:cNvPr id="11" name="">
             <a:extLst xmlns:a="http://schemas.openxmlformats.org/drawingml/2006/main">
               <a:ext uri="{FF2B5EF4-FFF2-40B4-BE49-F238E27FC236}">
-                <a16:creationId xmlns:a16="http://schemas.microsoft.com/office/drawing/2014/main" id="{482BAEBA-A559-4F58-B36B-C0EC0FE2D997}"/>
+                <a16:creationId xmlns:a16="http://schemas.microsoft.com/office/drawing/2014/main" id="{F04F25DE-8DD6-41FA-8E9F-E5E9DF2DEDC4}"/>
               </a:ext>
             </a:extLst>
           </p:cNvPr>
@@ -4854,7 +4854,7 @@
           <p:cNvPr id="12" name="">
             <a:extLst xmlns:a="http://schemas.openxmlformats.org/drawingml/2006/main">
               <a:ext uri="{FF2B5EF4-FFF2-40B4-BE49-F238E27FC236}">
-                <a16:creationId xmlns:a16="http://schemas.microsoft.com/office/drawing/2014/main" id="{A335BC80-2236-43A6-9D24-E85B6666FD1B}"/>
+                <a16:creationId xmlns:a16="http://schemas.microsoft.com/office/drawing/2014/main" id="{DDF505CF-CA4A-40B4-B45B-A7C491A6951B}"/>
               </a:ext>
             </a:extLst>
           </p:cNvPr>
@@ -4911,7 +4911,7 @@
           <p:cNvPr id="13" name="">
             <a:extLst xmlns:a="http://schemas.openxmlformats.org/drawingml/2006/main">
               <a:ext uri="{FF2B5EF4-FFF2-40B4-BE49-F238E27FC236}">
-                <a16:creationId xmlns:a16="http://schemas.microsoft.com/office/drawing/2014/main" id="{246A6FE4-E29A-434E-BC65-B189675D8EA1}"/>
+                <a16:creationId xmlns:a16="http://schemas.microsoft.com/office/drawing/2014/main" id="{1C2EF38C-6341-4293-AF85-5594AEDBEAD0}"/>
               </a:ext>
             </a:extLst>
           </p:cNvPr>
@@ -4968,7 +4968,7 @@
           <p:cNvPr id="14" name="">
             <a:extLst xmlns:a="http://schemas.openxmlformats.org/drawingml/2006/main">
               <a:ext uri="{FF2B5EF4-FFF2-40B4-BE49-F238E27FC236}">
-                <a16:creationId xmlns:a16="http://schemas.microsoft.com/office/drawing/2014/main" id="{694A1CF8-9BDF-42AD-B99F-913C9E61A496}"/>
+                <a16:creationId xmlns:a16="http://schemas.microsoft.com/office/drawing/2014/main" id="{CB6706C7-3827-40DA-BB00-AC175BB6A494}"/>
               </a:ext>
             </a:extLst>
           </p:cNvPr>
@@ -5002,7 +5002,7 @@
           <p:cNvPr id="15" name="">
             <a:extLst xmlns:a="http://schemas.openxmlformats.org/drawingml/2006/main">
               <a:ext uri="{FF2B5EF4-FFF2-40B4-BE49-F238E27FC236}">
-                <a16:creationId xmlns:a16="http://schemas.microsoft.com/office/drawing/2014/main" id="{761095E0-50A5-4B6C-9C07-762E59632562}"/>
+                <a16:creationId xmlns:a16="http://schemas.microsoft.com/office/drawing/2014/main" id="{0F222C08-1FDF-4EDE-969E-5CDFD4E3669E}"/>
               </a:ext>
             </a:extLst>
           </p:cNvPr>
@@ -5034,7 +5034,7 @@
           <p:cNvPr id="16" name="">
             <a:extLst xmlns:a="http://schemas.openxmlformats.org/drawingml/2006/main">
               <a:ext uri="{FF2B5EF4-FFF2-40B4-BE49-F238E27FC236}">
-                <a16:creationId xmlns:a16="http://schemas.microsoft.com/office/drawing/2014/main" id="{8468FE0F-BEF6-4CA0-90D5-115BC3BAFFA5}"/>
+                <a16:creationId xmlns:a16="http://schemas.microsoft.com/office/drawing/2014/main" id="{2E62848C-C430-4CB2-BBFB-B1BEE31C0A1A}"/>
               </a:ext>
             </a:extLst>
           </p:cNvPr>
@@ -5091,7 +5091,7 @@
           <p:cNvPr id="17" name="">
             <a:extLst xmlns:a="http://schemas.openxmlformats.org/drawingml/2006/main">
               <a:ext uri="{FF2B5EF4-FFF2-40B4-BE49-F238E27FC236}">
-                <a16:creationId xmlns:a16="http://schemas.microsoft.com/office/drawing/2014/main" id="{08F15D20-2F5E-4567-A47B-90546B3DC7A5}"/>
+                <a16:creationId xmlns:a16="http://schemas.microsoft.com/office/drawing/2014/main" id="{37964BBE-2A0A-4B55-B493-FBE9089F6CE4}"/>
               </a:ext>
             </a:extLst>
           </p:cNvPr>
@@ -5148,7 +5148,7 @@
           <p:cNvPr id="18" name="">
             <a:extLst xmlns:a="http://schemas.openxmlformats.org/drawingml/2006/main">
               <a:ext uri="{FF2B5EF4-FFF2-40B4-BE49-F238E27FC236}">
-                <a16:creationId xmlns:a16="http://schemas.microsoft.com/office/drawing/2014/main" id="{4A9DB587-18C7-4D87-8B75-F3155F9D5E8A}"/>
+                <a16:creationId xmlns:a16="http://schemas.microsoft.com/office/drawing/2014/main" id="{6BB900FB-1B36-45C6-96DA-6A10311529C9}"/>
               </a:ext>
             </a:extLst>
           </p:cNvPr>
@@ -5182,7 +5182,7 @@
           <p:cNvPr id="19" name="">
             <a:extLst xmlns:a="http://schemas.openxmlformats.org/drawingml/2006/main">
               <a:ext uri="{FF2B5EF4-FFF2-40B4-BE49-F238E27FC236}">
-                <a16:creationId xmlns:a16="http://schemas.microsoft.com/office/drawing/2014/main" id="{82E7AE13-62BF-40E0-9106-DCADF8978F56}"/>
+                <a16:creationId xmlns:a16="http://schemas.microsoft.com/office/drawing/2014/main" id="{58DDAC13-FBFE-41C5-B266-58CE0BC762CC}"/>
               </a:ext>
             </a:extLst>
           </p:cNvPr>
@@ -5214,7 +5214,7 @@
           <p:cNvPr id="20" name="">
             <a:extLst xmlns:a="http://schemas.openxmlformats.org/drawingml/2006/main">
               <a:ext uri="{FF2B5EF4-FFF2-40B4-BE49-F238E27FC236}">
-                <a16:creationId xmlns:a16="http://schemas.microsoft.com/office/drawing/2014/main" id="{3E35C6A9-BBFE-4FC9-AAAF-FAAF89551E6F}"/>
+                <a16:creationId xmlns:a16="http://schemas.microsoft.com/office/drawing/2014/main" id="{605F1E4A-6215-4391-8B90-25495213979C}"/>
               </a:ext>
             </a:extLst>
           </p:cNvPr>
@@ -5271,7 +5271,7 @@
           <p:cNvPr id="21" name="">
             <a:extLst xmlns:a="http://schemas.openxmlformats.org/drawingml/2006/main">
               <a:ext uri="{FF2B5EF4-FFF2-40B4-BE49-F238E27FC236}">
-                <a16:creationId xmlns:a16="http://schemas.microsoft.com/office/drawing/2014/main" id="{66F59032-B620-4D95-84B3-EDB1B1F80FE5}"/>
+                <a16:creationId xmlns:a16="http://schemas.microsoft.com/office/drawing/2014/main" id="{5ECC935A-E21F-4497-838E-95D87B1D8626}"/>
               </a:ext>
             </a:extLst>
           </p:cNvPr>
@@ -5328,7 +5328,7 @@
           <p:cNvPr id="22" name="">
             <a:extLst xmlns:a="http://schemas.openxmlformats.org/drawingml/2006/main">
               <a:ext uri="{FF2B5EF4-FFF2-40B4-BE49-F238E27FC236}">
-                <a16:creationId xmlns:a16="http://schemas.microsoft.com/office/drawing/2014/main" id="{1AF0A645-E7B3-43A2-91F1-CC0690836D81}"/>
+                <a16:creationId xmlns:a16="http://schemas.microsoft.com/office/drawing/2014/main" id="{16740CB5-0E7D-437C-BDC9-B6A1385A552F}"/>
               </a:ext>
             </a:extLst>
           </p:cNvPr>
@@ -5383,7 +5383,7 @@
     </p:spTree>
     <p:extLst>
       <p:ext uri="{BB962C8B-B14F-4D97-AF65-F5344CB8AC3E}">
-        <p14:creationId xmlns:p14="http://schemas.microsoft.com/office/powerpoint/2010/main" val="97947965"/>
+        <p14:creationId xmlns:p14="http://schemas.microsoft.com/office/powerpoint/2010/main" val="773332059"/>
       </p:ext>
     </p:extLst>
   </p:cSld>
@@ -5584,7 +5584,7 @@
           <p:cNvPr id="23" name="">
             <a:extLst xmlns:a="http://schemas.openxmlformats.org/drawingml/2006/main">
               <a:ext uri="{FF2B5EF4-FFF2-40B4-BE49-F238E27FC236}">
-                <a16:creationId xmlns:a16="http://schemas.microsoft.com/office/drawing/2014/main" id="{58584F84-0D69-493D-BDC8-E0F4937AA1F0}"/>
+                <a16:creationId xmlns:a16="http://schemas.microsoft.com/office/drawing/2014/main" id="{D822CDF0-3BAF-4BBE-8F99-6BB6A13D4733}"/>
               </a:ext>
             </a:extLst>
           </p:cNvPr>
@@ -5616,7 +5616,7 @@
           <p:cNvPr id="2" name="">
             <a:extLst xmlns:a="http://schemas.openxmlformats.org/drawingml/2006/main">
               <a:ext uri="{FF2B5EF4-FFF2-40B4-BE49-F238E27FC236}">
-                <a16:creationId xmlns:a16="http://schemas.microsoft.com/office/drawing/2014/main" id="{60D1ABE4-AA9F-4398-86AC-59FE43C98350}"/>
+                <a16:creationId xmlns:a16="http://schemas.microsoft.com/office/drawing/2014/main" id="{DDE8640C-A96F-422A-B24A-7BBBADA1139D}"/>
               </a:ext>
             </a:extLst>
           </p:cNvPr>
@@ -5673,7 +5673,7 @@
           <p:cNvPr id="3" name="">
             <a:extLst xmlns:a="http://schemas.openxmlformats.org/drawingml/2006/main">
               <a:ext uri="{FF2B5EF4-FFF2-40B4-BE49-F238E27FC236}">
-                <a16:creationId xmlns:a16="http://schemas.microsoft.com/office/drawing/2014/main" id="{A9F13C59-5093-447B-AC07-04B58563935A}"/>
+                <a16:creationId xmlns:a16="http://schemas.microsoft.com/office/drawing/2014/main" id="{4A042F36-13A8-4A43-A2E7-9B5D8F5289A5}"/>
               </a:ext>
             </a:extLst>
           </p:cNvPr>
@@ -5705,7 +5705,7 @@
           <p:cNvPr id="4" name="">
             <a:extLst xmlns:a="http://schemas.openxmlformats.org/drawingml/2006/main">
               <a:ext uri="{FF2B5EF4-FFF2-40B4-BE49-F238E27FC236}">
-                <a16:creationId xmlns:a16="http://schemas.microsoft.com/office/drawing/2014/main" id="{3E7B5068-5858-42DF-8A58-5F44A1146B08}"/>
+                <a16:creationId xmlns:a16="http://schemas.microsoft.com/office/drawing/2014/main" id="{B92ABA89-53D3-4AEC-B6DE-B807C596743D}"/>
               </a:ext>
             </a:extLst>
           </p:cNvPr>
@@ -5762,7 +5762,7 @@
           <p:cNvPr id="5" name="">
             <a:extLst xmlns:a="http://schemas.openxmlformats.org/drawingml/2006/main">
               <a:ext uri="{FF2B5EF4-FFF2-40B4-BE49-F238E27FC236}">
-                <a16:creationId xmlns:a16="http://schemas.microsoft.com/office/drawing/2014/main" id="{73AF9B52-2E03-4E28-B286-5C062063A9C1}"/>
+                <a16:creationId xmlns:a16="http://schemas.microsoft.com/office/drawing/2014/main" id="{D3F6ED19-E49C-4B0E-BB73-E95995616EB8}"/>
               </a:ext>
             </a:extLst>
           </p:cNvPr>
@@ -5819,7 +5819,7 @@
           <p:cNvPr id="6" name="">
             <a:extLst xmlns:a="http://schemas.openxmlformats.org/drawingml/2006/main">
               <a:ext uri="{FF2B5EF4-FFF2-40B4-BE49-F238E27FC236}">
-                <a16:creationId xmlns:a16="http://schemas.microsoft.com/office/drawing/2014/main" id="{AD078E7C-A438-4B23-83CD-9BC2E42E3B4E}"/>
+                <a16:creationId xmlns:a16="http://schemas.microsoft.com/office/drawing/2014/main" id="{29A597B8-1672-4512-9C84-B53890350910}"/>
               </a:ext>
             </a:extLst>
           </p:cNvPr>
@@ -5876,7 +5876,7 @@
           <p:cNvPr id="7" name="">
             <a:extLst xmlns:a="http://schemas.openxmlformats.org/drawingml/2006/main">
               <a:ext uri="{FF2B5EF4-FFF2-40B4-BE49-F238E27FC236}">
-                <a16:creationId xmlns:a16="http://schemas.microsoft.com/office/drawing/2014/main" id="{1BADA292-F55E-45A6-8F2C-50C63667CE2A}"/>
+                <a16:creationId xmlns:a16="http://schemas.microsoft.com/office/drawing/2014/main" id="{328FD337-58A8-4B2E-A2D9-32F9AB8FFE42}"/>
               </a:ext>
             </a:extLst>
           </p:cNvPr>
@@ -5908,7 +5908,7 @@
           <p:cNvPr id="8" name="">
             <a:extLst xmlns:a="http://schemas.openxmlformats.org/drawingml/2006/main">
               <a:ext uri="{FF2B5EF4-FFF2-40B4-BE49-F238E27FC236}">
-                <a16:creationId xmlns:a16="http://schemas.microsoft.com/office/drawing/2014/main" id="{08DA2854-61C4-4EDA-81D9-6F6815C71B85}"/>
+                <a16:creationId xmlns:a16="http://schemas.microsoft.com/office/drawing/2014/main" id="{501CD8E1-1622-4AFE-BDE4-68D92458E45A}"/>
               </a:ext>
             </a:extLst>
           </p:cNvPr>
@@ -5965,7 +5965,7 @@
           <p:cNvPr id="9" name="">
             <a:extLst xmlns:a="http://schemas.openxmlformats.org/drawingml/2006/main">
               <a:ext uri="{FF2B5EF4-FFF2-40B4-BE49-F238E27FC236}">
-                <a16:creationId xmlns:a16="http://schemas.microsoft.com/office/drawing/2014/main" id="{EEE45F02-C290-47B8-A36E-D7A15B476FAC}"/>
+                <a16:creationId xmlns:a16="http://schemas.microsoft.com/office/drawing/2014/main" id="{8BED1EE3-30DA-433B-8A81-D8842F0877EC}"/>
               </a:ext>
             </a:extLst>
           </p:cNvPr>
@@ -6022,7 +6022,7 @@
           <p:cNvPr id="10" name="">
             <a:extLst xmlns:a="http://schemas.openxmlformats.org/drawingml/2006/main">
               <a:ext uri="{FF2B5EF4-FFF2-40B4-BE49-F238E27FC236}">
-                <a16:creationId xmlns:a16="http://schemas.microsoft.com/office/drawing/2014/main" id="{BDDE5365-C3D3-46B4-A705-E511282E1CCB}"/>
+                <a16:creationId xmlns:a16="http://schemas.microsoft.com/office/drawing/2014/main" id="{6920202C-48F9-44EE-9961-F95E779AA8BE}"/>
               </a:ext>
             </a:extLst>
           </p:cNvPr>
@@ -6056,7 +6056,7 @@
           <p:cNvPr id="11" name="">
             <a:extLst xmlns:a="http://schemas.openxmlformats.org/drawingml/2006/main">
               <a:ext uri="{FF2B5EF4-FFF2-40B4-BE49-F238E27FC236}">
-                <a16:creationId xmlns:a16="http://schemas.microsoft.com/office/drawing/2014/main" id="{CBBBC6CB-4CB5-4FF7-A7C5-30CAB458EC88}"/>
+                <a16:creationId xmlns:a16="http://schemas.microsoft.com/office/drawing/2014/main" id="{A6CFA215-3386-4208-9A0D-89E47B5E4A8B}"/>
               </a:ext>
             </a:extLst>
           </p:cNvPr>
@@ -6088,7 +6088,7 @@
           <p:cNvPr id="12" name="">
             <a:extLst xmlns:a="http://schemas.openxmlformats.org/drawingml/2006/main">
               <a:ext uri="{FF2B5EF4-FFF2-40B4-BE49-F238E27FC236}">
-                <a16:creationId xmlns:a16="http://schemas.microsoft.com/office/drawing/2014/main" id="{AC429B1E-FFAF-43DB-92CD-B477D98213D6}"/>
+                <a16:creationId xmlns:a16="http://schemas.microsoft.com/office/drawing/2014/main" id="{A7BA6E77-0E70-40F9-8286-E2EDD829088A}"/>
               </a:ext>
             </a:extLst>
           </p:cNvPr>
@@ -6145,7 +6145,7 @@
           <p:cNvPr id="13" name="">
             <a:extLst xmlns:a="http://schemas.openxmlformats.org/drawingml/2006/main">
               <a:ext uri="{FF2B5EF4-FFF2-40B4-BE49-F238E27FC236}">
-                <a16:creationId xmlns:a16="http://schemas.microsoft.com/office/drawing/2014/main" id="{DCEC3655-227D-43FA-BA72-5CF576D0D0F1}"/>
+                <a16:creationId xmlns:a16="http://schemas.microsoft.com/office/drawing/2014/main" id="{3E34C1E6-249B-4043-B92A-B2D88B1E186D}"/>
               </a:ext>
             </a:extLst>
           </p:cNvPr>
@@ -6202,7 +6202,7 @@
           <p:cNvPr id="14" name="">
             <a:extLst xmlns:a="http://schemas.openxmlformats.org/drawingml/2006/main">
               <a:ext uri="{FF2B5EF4-FFF2-40B4-BE49-F238E27FC236}">
-                <a16:creationId xmlns:a16="http://schemas.microsoft.com/office/drawing/2014/main" id="{96966FDD-3544-409B-B3FC-B725415DB8E8}"/>
+                <a16:creationId xmlns:a16="http://schemas.microsoft.com/office/drawing/2014/main" id="{B1F226A5-15EA-4EF8-AD9E-58A34F1EE86A}"/>
               </a:ext>
             </a:extLst>
           </p:cNvPr>
@@ -6236,7 +6236,7 @@
           <p:cNvPr id="15" name="">
             <a:extLst xmlns:a="http://schemas.openxmlformats.org/drawingml/2006/main">
               <a:ext uri="{FF2B5EF4-FFF2-40B4-BE49-F238E27FC236}">
-                <a16:creationId xmlns:a16="http://schemas.microsoft.com/office/drawing/2014/main" id="{A6C1B80E-7163-4620-AD59-F87E5A9BB279}"/>
+                <a16:creationId xmlns:a16="http://schemas.microsoft.com/office/drawing/2014/main" id="{DE54B3B2-6319-4149-8555-105709AC2116}"/>
               </a:ext>
             </a:extLst>
           </p:cNvPr>
@@ -6268,7 +6268,7 @@
           <p:cNvPr id="16" name="">
             <a:extLst xmlns:a="http://schemas.openxmlformats.org/drawingml/2006/main">
               <a:ext uri="{FF2B5EF4-FFF2-40B4-BE49-F238E27FC236}">
-                <a16:creationId xmlns:a16="http://schemas.microsoft.com/office/drawing/2014/main" id="{2083452B-F3DD-40C1-A1D1-B006A429AEB1}"/>
+                <a16:creationId xmlns:a16="http://schemas.microsoft.com/office/drawing/2014/main" id="{895995FF-7832-468D-BB9F-43B0F4C7364C}"/>
               </a:ext>
             </a:extLst>
           </p:cNvPr>
@@ -6325,7 +6325,7 @@
           <p:cNvPr id="17" name="">
             <a:extLst xmlns:a="http://schemas.openxmlformats.org/drawingml/2006/main">
               <a:ext uri="{FF2B5EF4-FFF2-40B4-BE49-F238E27FC236}">
-                <a16:creationId xmlns:a16="http://schemas.microsoft.com/office/drawing/2014/main" id="{2765920C-9A77-4CBC-9F18-59118A6087BD}"/>
+                <a16:creationId xmlns:a16="http://schemas.microsoft.com/office/drawing/2014/main" id="{90FE49FD-8B1A-471D-800F-701A5272D08C}"/>
               </a:ext>
             </a:extLst>
           </p:cNvPr>
@@ -6382,7 +6382,7 @@
           <p:cNvPr id="18" name="">
             <a:extLst xmlns:a="http://schemas.openxmlformats.org/drawingml/2006/main">
               <a:ext uri="{FF2B5EF4-FFF2-40B4-BE49-F238E27FC236}">
-                <a16:creationId xmlns:a16="http://schemas.microsoft.com/office/drawing/2014/main" id="{EA80FC1F-B7D9-41C0-9700-584F98A74619}"/>
+                <a16:creationId xmlns:a16="http://schemas.microsoft.com/office/drawing/2014/main" id="{3B9DD8B5-6C41-4BF1-99B9-B074DAB92EA4}"/>
               </a:ext>
             </a:extLst>
           </p:cNvPr>
@@ -6416,7 +6416,7 @@
           <p:cNvPr id="19" name="">
             <a:extLst xmlns:a="http://schemas.openxmlformats.org/drawingml/2006/main">
               <a:ext uri="{FF2B5EF4-FFF2-40B4-BE49-F238E27FC236}">
-                <a16:creationId xmlns:a16="http://schemas.microsoft.com/office/drawing/2014/main" id="{C0AA47C2-C141-4F55-A5C0-C106B7A815A4}"/>
+                <a16:creationId xmlns:a16="http://schemas.microsoft.com/office/drawing/2014/main" id="{F27FD2F1-BC3C-468A-BDA3-AB9DB8A9E1DD}"/>
               </a:ext>
             </a:extLst>
           </p:cNvPr>
@@ -6448,7 +6448,7 @@
           <p:cNvPr id="20" name="">
             <a:extLst xmlns:a="http://schemas.openxmlformats.org/drawingml/2006/main">
               <a:ext uri="{FF2B5EF4-FFF2-40B4-BE49-F238E27FC236}">
-                <a16:creationId xmlns:a16="http://schemas.microsoft.com/office/drawing/2014/main" id="{1D18B28D-479E-4119-9E29-9C59033C95DF}"/>
+                <a16:creationId xmlns:a16="http://schemas.microsoft.com/office/drawing/2014/main" id="{4A728198-B581-4C67-B68C-57F84333CDF0}"/>
               </a:ext>
             </a:extLst>
           </p:cNvPr>
@@ -6505,7 +6505,7 @@
           <p:cNvPr id="21" name="">
             <a:extLst xmlns:a="http://schemas.openxmlformats.org/drawingml/2006/main">
               <a:ext uri="{FF2B5EF4-FFF2-40B4-BE49-F238E27FC236}">
-                <a16:creationId xmlns:a16="http://schemas.microsoft.com/office/drawing/2014/main" id="{0F21A00D-BDE1-49FB-B4FE-51DCA91C4EA0}"/>
+                <a16:creationId xmlns:a16="http://schemas.microsoft.com/office/drawing/2014/main" id="{21E1EBD3-508B-421E-B1DE-3BFA7D7D19A5}"/>
               </a:ext>
             </a:extLst>
           </p:cNvPr>
@@ -6562,7 +6562,7 @@
           <p:cNvPr id="22" name="">
             <a:extLst xmlns:a="http://schemas.openxmlformats.org/drawingml/2006/main">
               <a:ext uri="{FF2B5EF4-FFF2-40B4-BE49-F238E27FC236}">
-                <a16:creationId xmlns:a16="http://schemas.microsoft.com/office/drawing/2014/main" id="{E1E9C9FB-FBC4-463A-AF1D-83718CE41E8E}"/>
+                <a16:creationId xmlns:a16="http://schemas.microsoft.com/office/drawing/2014/main" id="{F5F88410-A473-4E31-808B-7F402DE5C9CE}"/>
               </a:ext>
             </a:extLst>
           </p:cNvPr>
@@ -6617,7 +6617,7 @@
     </p:spTree>
     <p:extLst>
       <p:ext uri="{BB962C8B-B14F-4D97-AF65-F5344CB8AC3E}">
-        <p14:creationId xmlns:p14="http://schemas.microsoft.com/office/powerpoint/2010/main" val="451733624"/>
+        <p14:creationId xmlns:p14="http://schemas.microsoft.com/office/powerpoint/2010/main" val="479449733"/>
       </p:ext>
     </p:extLst>
   </p:cSld>
@@ -6818,7 +6818,7 @@
           <p:cNvPr id="16" name="">
             <a:extLst xmlns:a="http://schemas.openxmlformats.org/drawingml/2006/main">
               <a:ext uri="{FF2B5EF4-FFF2-40B4-BE49-F238E27FC236}">
-                <a16:creationId xmlns:a16="http://schemas.microsoft.com/office/drawing/2014/main" id="{1DD46B77-97A9-41DC-9F8A-E999C74B3727}"/>
+                <a16:creationId xmlns:a16="http://schemas.microsoft.com/office/drawing/2014/main" id="{98A6DE14-B3D1-4C20-8C49-A54F34B0E291}"/>
               </a:ext>
             </a:extLst>
           </p:cNvPr>
@@ -6850,7 +6850,7 @@
           <p:cNvPr id="2" name="">
             <a:extLst xmlns:a="http://schemas.openxmlformats.org/drawingml/2006/main">
               <a:ext uri="{FF2B5EF4-FFF2-40B4-BE49-F238E27FC236}">
-                <a16:creationId xmlns:a16="http://schemas.microsoft.com/office/drawing/2014/main" id="{87B68133-4693-4C97-A521-D67607E7DD34}"/>
+                <a16:creationId xmlns:a16="http://schemas.microsoft.com/office/drawing/2014/main" id="{967AAA97-9FC4-43AC-A009-8813DD021C78}"/>
               </a:ext>
             </a:extLst>
           </p:cNvPr>
@@ -6907,7 +6907,7 @@
           <p:cNvPr id="3" name="">
             <a:extLst xmlns:a="http://schemas.openxmlformats.org/drawingml/2006/main">
               <a:ext uri="{FF2B5EF4-FFF2-40B4-BE49-F238E27FC236}">
-                <a16:creationId xmlns:a16="http://schemas.microsoft.com/office/drawing/2014/main" id="{37068B3F-B00D-4300-8D92-1A8321305A3B}"/>
+                <a16:creationId xmlns:a16="http://schemas.microsoft.com/office/drawing/2014/main" id="{C41A9F61-9898-441A-B833-CB9EC362F815}"/>
               </a:ext>
             </a:extLst>
           </p:cNvPr>
@@ -6939,7 +6939,7 @@
           <p:cNvPr id="4" name="">
             <a:extLst xmlns:a="http://schemas.openxmlformats.org/drawingml/2006/main">
               <a:ext uri="{FF2B5EF4-FFF2-40B4-BE49-F238E27FC236}">
-                <a16:creationId xmlns:a16="http://schemas.microsoft.com/office/drawing/2014/main" id="{546BF6A9-6567-4E16-B588-63BAC2442D70}"/>
+                <a16:creationId xmlns:a16="http://schemas.microsoft.com/office/drawing/2014/main" id="{2BE46264-2A7F-42BD-96F2-6CA8B051652E}"/>
               </a:ext>
             </a:extLst>
           </p:cNvPr>
@@ -6996,7 +6996,7 @@
           <p:cNvPr id="5" name="">
             <a:extLst xmlns:a="http://schemas.openxmlformats.org/drawingml/2006/main">
               <a:ext uri="{FF2B5EF4-FFF2-40B4-BE49-F238E27FC236}">
-                <a16:creationId xmlns:a16="http://schemas.microsoft.com/office/drawing/2014/main" id="{B187B97F-8CCE-4A70-B47A-284262A6622F}"/>
+                <a16:creationId xmlns:a16="http://schemas.microsoft.com/office/drawing/2014/main" id="{E6B704F3-40A4-4F61-84A7-86587CDE492C}"/>
               </a:ext>
             </a:extLst>
           </p:cNvPr>
@@ -7053,7 +7053,7 @@
           <p:cNvPr id="6" name="">
             <a:extLst xmlns:a="http://schemas.openxmlformats.org/drawingml/2006/main">
               <a:ext uri="{FF2B5EF4-FFF2-40B4-BE49-F238E27FC236}">
-                <a16:creationId xmlns:a16="http://schemas.microsoft.com/office/drawing/2014/main" id="{9F4386B0-B335-4E65-AD5D-7F61C34B3224}"/>
+                <a16:creationId xmlns:a16="http://schemas.microsoft.com/office/drawing/2014/main" id="{44621B43-2104-441D-952B-ABD6CEB41CDA}"/>
               </a:ext>
             </a:extLst>
           </p:cNvPr>
@@ -7110,7 +7110,7 @@
           <p:cNvPr id="7" name="">
             <a:extLst xmlns:a="http://schemas.openxmlformats.org/drawingml/2006/main">
               <a:ext uri="{FF2B5EF4-FFF2-40B4-BE49-F238E27FC236}">
-                <a16:creationId xmlns:a16="http://schemas.microsoft.com/office/drawing/2014/main" id="{255ABDA3-52EB-4F76-AF3C-2D72D6E7EC78}"/>
+                <a16:creationId xmlns:a16="http://schemas.microsoft.com/office/drawing/2014/main" id="{2B7FCE7E-53A5-4841-8A26-509B5E562B94}"/>
               </a:ext>
             </a:extLst>
           </p:cNvPr>
@@ -7142,7 +7142,7 @@
           <p:cNvPr id="8" name="">
             <a:extLst xmlns:a="http://schemas.openxmlformats.org/drawingml/2006/main">
               <a:ext uri="{FF2B5EF4-FFF2-40B4-BE49-F238E27FC236}">
-                <a16:creationId xmlns:a16="http://schemas.microsoft.com/office/drawing/2014/main" id="{AAB543F3-FE29-4FF7-BF4C-6D33D95959C7}"/>
+                <a16:creationId xmlns:a16="http://schemas.microsoft.com/office/drawing/2014/main" id="{B8A33EC7-95BD-4F56-9FBC-ADD4E0E593C1}"/>
               </a:ext>
             </a:extLst>
           </p:cNvPr>
@@ -7199,7 +7199,7 @@
           <p:cNvPr id="9" name="">
             <a:extLst xmlns:a="http://schemas.openxmlformats.org/drawingml/2006/main">
               <a:ext uri="{FF2B5EF4-FFF2-40B4-BE49-F238E27FC236}">
-                <a16:creationId xmlns:a16="http://schemas.microsoft.com/office/drawing/2014/main" id="{86326457-B1F1-4C9E-8CB7-42697B3B4053}"/>
+                <a16:creationId xmlns:a16="http://schemas.microsoft.com/office/drawing/2014/main" id="{4D5392A4-82C6-44D7-98E6-A2A262C517D1}"/>
               </a:ext>
             </a:extLst>
           </p:cNvPr>
@@ -7256,7 +7256,7 @@
           <p:cNvPr id="10" name="">
             <a:extLst xmlns:a="http://schemas.openxmlformats.org/drawingml/2006/main">
               <a:ext uri="{FF2B5EF4-FFF2-40B4-BE49-F238E27FC236}">
-                <a16:creationId xmlns:a16="http://schemas.microsoft.com/office/drawing/2014/main" id="{11D1F424-0C28-454E-BDD2-9C69B6362DF3}"/>
+                <a16:creationId xmlns:a16="http://schemas.microsoft.com/office/drawing/2014/main" id="{8D8ED665-FEC5-4FB2-9009-DD5C49553463}"/>
               </a:ext>
             </a:extLst>
           </p:cNvPr>
@@ -7313,7 +7313,7 @@
           <p:cNvPr id="11" name="">
             <a:extLst xmlns:a="http://schemas.openxmlformats.org/drawingml/2006/main">
               <a:ext uri="{FF2B5EF4-FFF2-40B4-BE49-F238E27FC236}">
-                <a16:creationId xmlns:a16="http://schemas.microsoft.com/office/drawing/2014/main" id="{ACD2EB0E-CC98-427E-B680-86A4C62A1E4C}"/>
+                <a16:creationId xmlns:a16="http://schemas.microsoft.com/office/drawing/2014/main" id="{A90467D2-8AD2-4561-BA8B-AD3B3A216D2A}"/>
               </a:ext>
             </a:extLst>
           </p:cNvPr>
@@ -7345,7 +7345,7 @@
           <p:cNvPr id="12" name="">
             <a:extLst xmlns:a="http://schemas.openxmlformats.org/drawingml/2006/main">
               <a:ext uri="{FF2B5EF4-FFF2-40B4-BE49-F238E27FC236}">
-                <a16:creationId xmlns:a16="http://schemas.microsoft.com/office/drawing/2014/main" id="{CD915838-35F8-49C8-A180-0926571AE840}"/>
+                <a16:creationId xmlns:a16="http://schemas.microsoft.com/office/drawing/2014/main" id="{36B490F5-291E-4820-9628-6DBB4E36E304}"/>
               </a:ext>
             </a:extLst>
           </p:cNvPr>
@@ -7402,7 +7402,7 @@
           <p:cNvPr id="13" name="">
             <a:extLst xmlns:a="http://schemas.openxmlformats.org/drawingml/2006/main">
               <a:ext uri="{FF2B5EF4-FFF2-40B4-BE49-F238E27FC236}">
-                <a16:creationId xmlns:a16="http://schemas.microsoft.com/office/drawing/2014/main" id="{683BFE21-B6A6-403F-A05E-B2449452756B}"/>
+                <a16:creationId xmlns:a16="http://schemas.microsoft.com/office/drawing/2014/main" id="{11513D5F-C0AC-47D3-B18A-A6EEC23D3DEE}"/>
               </a:ext>
             </a:extLst>
           </p:cNvPr>
@@ -7459,7 +7459,7 @@
           <p:cNvPr id="14" name="">
             <a:extLst xmlns:a="http://schemas.openxmlformats.org/drawingml/2006/main">
               <a:ext uri="{FF2B5EF4-FFF2-40B4-BE49-F238E27FC236}">
-                <a16:creationId xmlns:a16="http://schemas.microsoft.com/office/drawing/2014/main" id="{F0AF2097-B353-4117-86AF-81EE7395FDAF}"/>
+                <a16:creationId xmlns:a16="http://schemas.microsoft.com/office/drawing/2014/main" id="{BF909C39-4E59-4D4B-9074-2CB123386876}"/>
               </a:ext>
             </a:extLst>
           </p:cNvPr>
@@ -7516,7 +7516,7 @@
           <p:cNvPr id="15" name="">
             <a:extLst xmlns:a="http://schemas.openxmlformats.org/drawingml/2006/main">
               <a:ext uri="{FF2B5EF4-FFF2-40B4-BE49-F238E27FC236}">
-                <a16:creationId xmlns:a16="http://schemas.microsoft.com/office/drawing/2014/main" id="{2CE6E8B3-55F8-4EB3-A94D-5C7AC0B5EAD6}"/>
+                <a16:creationId xmlns:a16="http://schemas.microsoft.com/office/drawing/2014/main" id="{1B1B80D7-DDAE-4E45-AEC0-180B641A4334}"/>
               </a:ext>
             </a:extLst>
           </p:cNvPr>
@@ -7571,7 +7571,7 @@
     </p:spTree>
     <p:extLst>
       <p:ext uri="{BB962C8B-B14F-4D97-AF65-F5344CB8AC3E}">
-        <p14:creationId xmlns:p14="http://schemas.microsoft.com/office/powerpoint/2010/main" val="767709943"/>
+        <p14:creationId xmlns:p14="http://schemas.microsoft.com/office/powerpoint/2010/main" val="582673735"/>
       </p:ext>
     </p:extLst>
   </p:cSld>
@@ -7772,7 +7772,7 @@
           <p:cNvPr id="23" name="">
             <a:extLst xmlns:a="http://schemas.openxmlformats.org/drawingml/2006/main">
               <a:ext uri="{FF2B5EF4-FFF2-40B4-BE49-F238E27FC236}">
-                <a16:creationId xmlns:a16="http://schemas.microsoft.com/office/drawing/2014/main" id="{B5C21BC7-17EC-4FF7-88FE-132FA6FE068B}"/>
+                <a16:creationId xmlns:a16="http://schemas.microsoft.com/office/drawing/2014/main" id="{E3B0AB45-B4F0-440C-A425-5EA71E68541F}"/>
               </a:ext>
             </a:extLst>
           </p:cNvPr>
@@ -7804,7 +7804,7 @@
           <p:cNvPr id="2" name="">
             <a:extLst xmlns:a="http://schemas.openxmlformats.org/drawingml/2006/main">
               <a:ext uri="{FF2B5EF4-FFF2-40B4-BE49-F238E27FC236}">
-                <a16:creationId xmlns:a16="http://schemas.microsoft.com/office/drawing/2014/main" id="{AA4EA7B8-2C25-4862-A43B-569BC5C94AFB}"/>
+                <a16:creationId xmlns:a16="http://schemas.microsoft.com/office/drawing/2014/main" id="{F0B622FB-97A7-4837-BE9E-5C46184BCE8E}"/>
               </a:ext>
             </a:extLst>
           </p:cNvPr>
@@ -7861,7 +7861,7 @@
           <p:cNvPr id="3" name="">
             <a:extLst xmlns:a="http://schemas.openxmlformats.org/drawingml/2006/main">
               <a:ext uri="{FF2B5EF4-FFF2-40B4-BE49-F238E27FC236}">
-                <a16:creationId xmlns:a16="http://schemas.microsoft.com/office/drawing/2014/main" id="{BE61A529-2C13-4A37-9BBF-661096BB3775}"/>
+                <a16:creationId xmlns:a16="http://schemas.microsoft.com/office/drawing/2014/main" id="{61FE47F7-5190-43D1-AC29-016FD5AF467E}"/>
               </a:ext>
             </a:extLst>
           </p:cNvPr>
@@ -7893,7 +7893,7 @@
           <p:cNvPr id="4" name="">
             <a:extLst xmlns:a="http://schemas.openxmlformats.org/drawingml/2006/main">
               <a:ext uri="{FF2B5EF4-FFF2-40B4-BE49-F238E27FC236}">
-                <a16:creationId xmlns:a16="http://schemas.microsoft.com/office/drawing/2014/main" id="{2DEE2128-EDA0-4BD6-98EF-06CA9B370F83}"/>
+                <a16:creationId xmlns:a16="http://schemas.microsoft.com/office/drawing/2014/main" id="{2323EB85-8FBB-4457-AE49-14777E27E921}"/>
               </a:ext>
             </a:extLst>
           </p:cNvPr>
@@ -7950,7 +7950,7 @@
           <p:cNvPr id="5" name="">
             <a:extLst xmlns:a="http://schemas.openxmlformats.org/drawingml/2006/main">
               <a:ext uri="{FF2B5EF4-FFF2-40B4-BE49-F238E27FC236}">
-                <a16:creationId xmlns:a16="http://schemas.microsoft.com/office/drawing/2014/main" id="{16B0CDB5-D91C-4DBC-BD5E-275A10359291}"/>
+                <a16:creationId xmlns:a16="http://schemas.microsoft.com/office/drawing/2014/main" id="{27FFAE36-1205-486E-8D7E-261FED465174}"/>
               </a:ext>
             </a:extLst>
           </p:cNvPr>
@@ -8007,7 +8007,7 @@
           <p:cNvPr id="6" name="">
             <a:extLst xmlns:a="http://schemas.openxmlformats.org/drawingml/2006/main">
               <a:ext uri="{FF2B5EF4-FFF2-40B4-BE49-F238E27FC236}">
-                <a16:creationId xmlns:a16="http://schemas.microsoft.com/office/drawing/2014/main" id="{F351AFF2-2CC9-4A0C-A04F-1F47200EE38B}"/>
+                <a16:creationId xmlns:a16="http://schemas.microsoft.com/office/drawing/2014/main" id="{D6CEFCA7-9FF3-49BC-9B5D-49B6AC283F3A}"/>
               </a:ext>
             </a:extLst>
           </p:cNvPr>
@@ -8064,7 +8064,7 @@
           <p:cNvPr id="7" name="">
             <a:extLst xmlns:a="http://schemas.openxmlformats.org/drawingml/2006/main">
               <a:ext uri="{FF2B5EF4-FFF2-40B4-BE49-F238E27FC236}">
-                <a16:creationId xmlns:a16="http://schemas.microsoft.com/office/drawing/2014/main" id="{A801545F-CBFD-4AAD-8ADC-7C7100DCC6AC}"/>
+                <a16:creationId xmlns:a16="http://schemas.microsoft.com/office/drawing/2014/main" id="{C8FB6F9C-5B3B-4B74-8267-81CA87E061E7}"/>
               </a:ext>
             </a:extLst>
           </p:cNvPr>
@@ -8096,7 +8096,7 @@
           <p:cNvPr id="8" name="">
             <a:extLst xmlns:a="http://schemas.openxmlformats.org/drawingml/2006/main">
               <a:ext uri="{FF2B5EF4-FFF2-40B4-BE49-F238E27FC236}">
-                <a16:creationId xmlns:a16="http://schemas.microsoft.com/office/drawing/2014/main" id="{04F5B7D9-8A47-4E2E-86B2-C1887EDC02B5}"/>
+                <a16:creationId xmlns:a16="http://schemas.microsoft.com/office/drawing/2014/main" id="{0D57425D-14A1-4BEC-AC6E-572A9C6AEBCF}"/>
               </a:ext>
             </a:extLst>
           </p:cNvPr>
@@ -8153,7 +8153,7 @@
           <p:cNvPr id="9" name="">
             <a:extLst xmlns:a="http://schemas.openxmlformats.org/drawingml/2006/main">
               <a:ext uri="{FF2B5EF4-FFF2-40B4-BE49-F238E27FC236}">
-                <a16:creationId xmlns:a16="http://schemas.microsoft.com/office/drawing/2014/main" id="{5FA7E294-D38C-4F94-BB9A-03C59D290648}"/>
+                <a16:creationId xmlns:a16="http://schemas.microsoft.com/office/drawing/2014/main" id="{4FA68676-90C4-478B-92FB-87554D48064E}"/>
               </a:ext>
             </a:extLst>
           </p:cNvPr>
@@ -8210,19 +8210,19 @@
           <p:cNvPr id="10" name="">
             <a:extLst xmlns:a="http://schemas.openxmlformats.org/drawingml/2006/main">
               <a:ext uri="{FF2B5EF4-FFF2-40B4-BE49-F238E27FC236}">
-                <a16:creationId xmlns:a16="http://schemas.microsoft.com/office/drawing/2014/main" id="{4AB66924-0E56-41C1-A33F-18784458D4E8}"/>
-              </a:ext>
-            </a:extLst>
-          </p:cNvPr>
-          <p:cNvSpPr>
-            <a:spLocks xmlns:a="http://schemas.openxmlformats.org/drawingml/2006/main" noGrp="1"/>
-          </p:cNvSpPr>
-          <p:nvPr/>
-        </p:nvSpPr>
-        <p:spPr>
-          <a:xfrm xmlns:a="http://schemas.openxmlformats.org/drawingml/2006/main">
-            <a:off x="914400" y="1257300"/>
-            <a:ext cx="10363200" cy="781050"/>
+                <a16:creationId xmlns:a16="http://schemas.microsoft.com/office/drawing/2014/main" id="{C402E948-0B17-4194-BC21-8577205C1B43}"/>
+              </a:ext>
+            </a:extLst>
+          </p:cNvPr>
+          <p:cNvSpPr>
+            <a:spLocks xmlns:a="http://schemas.openxmlformats.org/drawingml/2006/main" noGrp="1"/>
+          </p:cNvSpPr>
+          <p:nvPr/>
+        </p:nvSpPr>
+        <p:spPr>
+          <a:xfrm xmlns:a="http://schemas.openxmlformats.org/drawingml/2006/main">
+            <a:off x="857250" y="1219200"/>
+            <a:ext cx="10477500" cy="742950"/>
           </a:xfrm>
           <a:prstGeom xmlns:a="http://schemas.openxmlformats.org/drawingml/2006/main" prst="rect">
             <a:avLst/>
@@ -8239,7 +8239,7 @@
           <a:lstStyle xmlns:a="http://schemas.openxmlformats.org/drawingml/2006/main"/>
           <a:p xmlns:a="http://schemas.openxmlformats.org/drawingml/2006/main">
             <a:pPr algn="ctr">
-              <a:defRPr sz="2175" b="1">
+              <a:defRPr sz="2100" b="1">
                 <a:solidFill>
                   <a:srgbClr val="17253A"/>
                 </a:solidFill>
@@ -8249,7 +8249,7 @@
               </a:defRPr>
             </a:pPr>
             <a:r>
-              <a:rPr sz="2175" b="1">
+              <a:rPr sz="2100" b="1">
                 <a:solidFill>
                   <a:srgbClr val="17253A"/>
                 </a:solidFill>
@@ -8267,28 +8267,30 @@
           <p:cNvPr id="11" name="">
             <a:extLst xmlns:a="http://schemas.openxmlformats.org/drawingml/2006/main">
               <a:ext uri="{FF2B5EF4-FFF2-40B4-BE49-F238E27FC236}">
-                <a16:creationId xmlns:a16="http://schemas.microsoft.com/office/drawing/2014/main" id="{0CAB42A1-1CA8-4182-B163-EBE8B2A7EE52}"/>
-              </a:ext>
-            </a:extLst>
-          </p:cNvPr>
-          <p:cNvSpPr>
-            <a:spLocks xmlns:a="http://schemas.openxmlformats.org/drawingml/2006/main" noGrp="1"/>
-          </p:cNvSpPr>
-          <p:nvPr/>
-        </p:nvSpPr>
-        <p:spPr>
-          <a:xfrm xmlns:a="http://schemas.openxmlformats.org/drawingml/2006/main">
-            <a:off x="1000125" y="2247900"/>
-            <a:ext cx="476250" cy="476250"/>
-          </a:xfrm>
-          <a:prstGeom xmlns:a="http://schemas.openxmlformats.org/drawingml/2006/main" prst="ellipse">
+                <a16:creationId xmlns:a16="http://schemas.microsoft.com/office/drawing/2014/main" id="{7C6BABBD-D49A-4A4D-AAFD-25152B90E0C8}"/>
+              </a:ext>
+            </a:extLst>
+          </p:cNvPr>
+          <p:cNvSpPr>
+            <a:spLocks xmlns:a="http://schemas.openxmlformats.org/drawingml/2006/main" noGrp="1"/>
+          </p:cNvSpPr>
+          <p:nvPr/>
+        </p:nvSpPr>
+        <p:spPr>
+          <a:xfrm xmlns:a="http://schemas.openxmlformats.org/drawingml/2006/main">
+            <a:off x="971550" y="2124075"/>
+            <a:ext cx="38100" cy="3524250"/>
+          </a:xfrm>
+          <a:prstGeom xmlns:a="http://schemas.openxmlformats.org/drawingml/2006/main" prst="rect">
             <a:avLst/>
           </a:prstGeom>
           <a:solidFill xmlns:a="http://schemas.openxmlformats.org/drawingml/2006/main">
-            <a:srgbClr val="18324A"/>
+            <a:srgbClr val="2C6E73"/>
           </a:solidFill>
           <a:ln xmlns:a="http://schemas.openxmlformats.org/drawingml/2006/main" w="0">
-            <a:noFill/>
+            <a:solidFill>
+              <a:srgbClr val="2C6E73"/>
+            </a:solidFill>
           </a:ln>
         </p:spPr>
       </p:sp>
@@ -8297,19 +8299,19 @@
           <p:cNvPr id="12" name="">
             <a:extLst xmlns:a="http://schemas.openxmlformats.org/drawingml/2006/main">
               <a:ext uri="{FF2B5EF4-FFF2-40B4-BE49-F238E27FC236}">
-                <a16:creationId xmlns:a16="http://schemas.microsoft.com/office/drawing/2014/main" id="{12833C5F-B335-4230-AF53-57C2F1BAFDE2}"/>
-              </a:ext>
-            </a:extLst>
-          </p:cNvPr>
-          <p:cNvSpPr>
-            <a:spLocks xmlns:a="http://schemas.openxmlformats.org/drawingml/2006/main" noGrp="1"/>
-          </p:cNvSpPr>
-          <p:nvPr/>
-        </p:nvSpPr>
-        <p:spPr>
-          <a:xfrm xmlns:a="http://schemas.openxmlformats.org/drawingml/2006/main">
-            <a:off x="1000125" y="2276475"/>
-            <a:ext cx="476250" cy="419100"/>
+                <a16:creationId xmlns:a16="http://schemas.microsoft.com/office/drawing/2014/main" id="{71FB09BF-28BA-47DB-A24E-84664E71A503}"/>
+              </a:ext>
+            </a:extLst>
+          </p:cNvPr>
+          <p:cNvSpPr>
+            <a:spLocks xmlns:a="http://schemas.openxmlformats.org/drawingml/2006/main" noGrp="1"/>
+          </p:cNvSpPr>
+          <p:nvPr/>
+        </p:nvSpPr>
+        <p:spPr>
+          <a:xfrm xmlns:a="http://schemas.openxmlformats.org/drawingml/2006/main">
+            <a:off x="1162050" y="2200275"/>
+            <a:ext cx="400050" cy="400050"/>
           </a:xfrm>
           <a:prstGeom xmlns:a="http://schemas.openxmlformats.org/drawingml/2006/main" prst="rect">
             <a:avLst/>
@@ -8326,9 +8328,9 @@
           <a:lstStyle xmlns:a="http://schemas.openxmlformats.org/drawingml/2006/main"/>
           <a:p xmlns:a="http://schemas.openxmlformats.org/drawingml/2006/main">
             <a:pPr algn="ctr">
-              <a:defRPr sz="1350" b="1">
-                <a:solidFill>
-                  <a:srgbClr val="FFFFFF"/>
+              <a:defRPr sz="1125" b="1">
+                <a:solidFill>
+                  <a:srgbClr val="2C6E73"/>
                 </a:solidFill>
                 <a:latin typeface="Arial"/>
                 <a:ea typeface="Arial"/>
@@ -8336,9 +8338,9 @@
               </a:defRPr>
             </a:pPr>
             <a:r>
-              <a:rPr sz="1350" b="1">
-                <a:solidFill>
-                  <a:srgbClr val="FFFFFF"/>
+              <a:rPr sz="1125" b="1">
+                <a:solidFill>
+                  <a:srgbClr val="2C6E73"/>
                 </a:solidFill>
                 <a:latin typeface="Arial"/>
                 <a:ea typeface="Arial"/>
@@ -8354,19 +8356,19 @@
           <p:cNvPr id="13" name="">
             <a:extLst xmlns:a="http://schemas.openxmlformats.org/drawingml/2006/main">
               <a:ext uri="{FF2B5EF4-FFF2-40B4-BE49-F238E27FC236}">
-                <a16:creationId xmlns:a16="http://schemas.microsoft.com/office/drawing/2014/main" id="{6B4320B7-F01F-472F-B335-16C9EDAED064}"/>
-              </a:ext>
-            </a:extLst>
-          </p:cNvPr>
-          <p:cNvSpPr>
-            <a:spLocks xmlns:a="http://schemas.openxmlformats.org/drawingml/2006/main" noGrp="1"/>
-          </p:cNvSpPr>
-          <p:nvPr/>
-        </p:nvSpPr>
-        <p:spPr>
-          <a:xfrm xmlns:a="http://schemas.openxmlformats.org/drawingml/2006/main">
-            <a:off x="1714500" y="2181225"/>
-            <a:ext cx="9429750" cy="609600"/>
+                <a16:creationId xmlns:a16="http://schemas.microsoft.com/office/drawing/2014/main" id="{8E98ECD9-68CC-4190-AA16-02DCC6EC0368}"/>
+              </a:ext>
+            </a:extLst>
+          </p:cNvPr>
+          <p:cNvSpPr>
+            <a:spLocks xmlns:a="http://schemas.openxmlformats.org/drawingml/2006/main" noGrp="1"/>
+          </p:cNvSpPr>
+          <p:nvPr/>
+        </p:nvSpPr>
+        <p:spPr>
+          <a:xfrm xmlns:a="http://schemas.openxmlformats.org/drawingml/2006/main">
+            <a:off x="1714500" y="2114550"/>
+            <a:ext cx="9525000" cy="809625"/>
           </a:xfrm>
           <a:prstGeom xmlns:a="http://schemas.openxmlformats.org/drawingml/2006/main" prst="rect">
             <a:avLst/>
@@ -8383,7 +8385,7 @@
           <a:lstStyle xmlns:a="http://schemas.openxmlformats.org/drawingml/2006/main"/>
           <a:p xmlns:a="http://schemas.openxmlformats.org/drawingml/2006/main">
             <a:pPr algn="l">
-              <a:defRPr sz="1500" b="0">
+              <a:defRPr sz="1725" b="0">
                 <a:solidFill>
                   <a:srgbClr val="17253A"/>
                 </a:solidFill>
@@ -8393,7 +8395,7 @@
               </a:defRPr>
             </a:pPr>
             <a:r>
-              <a:rPr sz="1500" b="0">
+              <a:rPr sz="1725" b="0">
                 <a:solidFill>
                   <a:srgbClr val="17253A"/>
                 </a:solidFill>
@@ -8401,7 +8403,7 @@
                 <a:ea typeface="Arial"/>
                 <a:cs typeface="Arial"/>
               </a:rPr>
-              <a:t>Identify the structure: Read the title, labels, scale and total before calculating.</a:t>
+              <a:t>Graph rises from 18 to 46</a:t>
             </a:r>
           </a:p>
         </p:txBody>
@@ -8411,28 +8413,30 @@
           <p:cNvPr id="14" name="">
             <a:extLst xmlns:a="http://schemas.openxmlformats.org/drawingml/2006/main">
               <a:ext uri="{FF2B5EF4-FFF2-40B4-BE49-F238E27FC236}">
-                <a16:creationId xmlns:a16="http://schemas.microsoft.com/office/drawing/2014/main" id="{DE20D321-F570-4898-B399-336183C08BD8}"/>
-              </a:ext>
-            </a:extLst>
-          </p:cNvPr>
-          <p:cNvSpPr>
-            <a:spLocks xmlns:a="http://schemas.openxmlformats.org/drawingml/2006/main" noGrp="1"/>
-          </p:cNvSpPr>
-          <p:nvPr/>
-        </p:nvSpPr>
-        <p:spPr>
-          <a:xfrm xmlns:a="http://schemas.openxmlformats.org/drawingml/2006/main">
-            <a:off x="1000125" y="2990850"/>
-            <a:ext cx="476250" cy="476250"/>
-          </a:xfrm>
-          <a:prstGeom xmlns:a="http://schemas.openxmlformats.org/drawingml/2006/main" prst="ellipse">
+                <a16:creationId xmlns:a16="http://schemas.microsoft.com/office/drawing/2014/main" id="{8398F38A-889B-42D1-8F80-D71E12689648}"/>
+              </a:ext>
+            </a:extLst>
+          </p:cNvPr>
+          <p:cNvSpPr>
+            <a:spLocks xmlns:a="http://schemas.openxmlformats.org/drawingml/2006/main" noGrp="1"/>
+          </p:cNvSpPr>
+          <p:nvPr/>
+        </p:nvSpPr>
+        <p:spPr>
+          <a:xfrm xmlns:a="http://schemas.openxmlformats.org/drawingml/2006/main">
+            <a:off x="1714500" y="2943225"/>
+            <a:ext cx="9334500" cy="9525"/>
+          </a:xfrm>
+          <a:prstGeom xmlns:a="http://schemas.openxmlformats.org/drawingml/2006/main" prst="rect">
             <a:avLst/>
           </a:prstGeom>
           <a:solidFill xmlns:a="http://schemas.openxmlformats.org/drawingml/2006/main">
-            <a:srgbClr val="2C6E73"/>
+            <a:srgbClr val="D9E0E6"/>
           </a:solidFill>
           <a:ln xmlns:a="http://schemas.openxmlformats.org/drawingml/2006/main" w="0">
-            <a:noFill/>
+            <a:solidFill>
+              <a:srgbClr val="D9E0E6"/>
+            </a:solidFill>
           </a:ln>
         </p:spPr>
       </p:sp>
@@ -8441,19 +8445,19 @@
           <p:cNvPr id="15" name="">
             <a:extLst xmlns:a="http://schemas.openxmlformats.org/drawingml/2006/main">
               <a:ext uri="{FF2B5EF4-FFF2-40B4-BE49-F238E27FC236}">
-                <a16:creationId xmlns:a16="http://schemas.microsoft.com/office/drawing/2014/main" id="{E05BFABE-ED80-4E71-947F-7780A5432720}"/>
-              </a:ext>
-            </a:extLst>
-          </p:cNvPr>
-          <p:cNvSpPr>
-            <a:spLocks xmlns:a="http://schemas.openxmlformats.org/drawingml/2006/main" noGrp="1"/>
-          </p:cNvSpPr>
-          <p:nvPr/>
-        </p:nvSpPr>
-        <p:spPr>
-          <a:xfrm xmlns:a="http://schemas.openxmlformats.org/drawingml/2006/main">
-            <a:off x="1000125" y="3019425"/>
-            <a:ext cx="476250" cy="419100"/>
+                <a16:creationId xmlns:a16="http://schemas.microsoft.com/office/drawing/2014/main" id="{8214F475-BB22-4970-9FD3-2B3A7D9CDFCE}"/>
+              </a:ext>
+            </a:extLst>
+          </p:cNvPr>
+          <p:cNvSpPr>
+            <a:spLocks xmlns:a="http://schemas.openxmlformats.org/drawingml/2006/main" noGrp="1"/>
+          </p:cNvSpPr>
+          <p:nvPr/>
+        </p:nvSpPr>
+        <p:spPr>
+          <a:xfrm xmlns:a="http://schemas.openxmlformats.org/drawingml/2006/main">
+            <a:off x="1162050" y="3076575"/>
+            <a:ext cx="400050" cy="400050"/>
           </a:xfrm>
           <a:prstGeom xmlns:a="http://schemas.openxmlformats.org/drawingml/2006/main" prst="rect">
             <a:avLst/>
@@ -8470,9 +8474,9 @@
           <a:lstStyle xmlns:a="http://schemas.openxmlformats.org/drawingml/2006/main"/>
           <a:p xmlns:a="http://schemas.openxmlformats.org/drawingml/2006/main">
             <a:pPr algn="ctr">
-              <a:defRPr sz="1350" b="1">
-                <a:solidFill>
-                  <a:srgbClr val="FFFFFF"/>
+              <a:defRPr sz="1125" b="1">
+                <a:solidFill>
+                  <a:srgbClr val="2C6E73"/>
                 </a:solidFill>
                 <a:latin typeface="Arial"/>
                 <a:ea typeface="Arial"/>
@@ -8480,9 +8484,9 @@
               </a:defRPr>
             </a:pPr>
             <a:r>
-              <a:rPr sz="1350" b="1">
-                <a:solidFill>
-                  <a:srgbClr val="FFFFFF"/>
+              <a:rPr sz="1125" b="1">
+                <a:solidFill>
+                  <a:srgbClr val="2C6E73"/>
                 </a:solidFill>
                 <a:latin typeface="Arial"/>
                 <a:ea typeface="Arial"/>
@@ -8498,19 +8502,19 @@
           <p:cNvPr id="16" name="">
             <a:extLst xmlns:a="http://schemas.openxmlformats.org/drawingml/2006/main">
               <a:ext uri="{FF2B5EF4-FFF2-40B4-BE49-F238E27FC236}">
-                <a16:creationId xmlns:a16="http://schemas.microsoft.com/office/drawing/2014/main" id="{64436E32-8983-4216-B4C6-7656BEEACF50}"/>
-              </a:ext>
-            </a:extLst>
-          </p:cNvPr>
-          <p:cNvSpPr>
-            <a:spLocks xmlns:a="http://schemas.openxmlformats.org/drawingml/2006/main" noGrp="1"/>
-          </p:cNvSpPr>
-          <p:nvPr/>
-        </p:nvSpPr>
-        <p:spPr>
-          <a:xfrm xmlns:a="http://schemas.openxmlformats.org/drawingml/2006/main">
-            <a:off x="1714500" y="2924175"/>
-            <a:ext cx="9429750" cy="609600"/>
+                <a16:creationId xmlns:a16="http://schemas.microsoft.com/office/drawing/2014/main" id="{FF3BBAA8-556D-46D9-8E1E-FF827209E4F2}"/>
+              </a:ext>
+            </a:extLst>
+          </p:cNvPr>
+          <p:cNvSpPr>
+            <a:spLocks xmlns:a="http://schemas.openxmlformats.org/drawingml/2006/main" noGrp="1"/>
+          </p:cNvSpPr>
+          <p:nvPr/>
+        </p:nvSpPr>
+        <p:spPr>
+          <a:xfrm xmlns:a="http://schemas.openxmlformats.org/drawingml/2006/main">
+            <a:off x="1714500" y="2990850"/>
+            <a:ext cx="9525000" cy="809625"/>
           </a:xfrm>
           <a:prstGeom xmlns:a="http://schemas.openxmlformats.org/drawingml/2006/main" prst="rect">
             <a:avLst/>
@@ -8527,7 +8531,7 @@
           <a:lstStyle xmlns:a="http://schemas.openxmlformats.org/drawingml/2006/main"/>
           <a:p xmlns:a="http://schemas.openxmlformats.org/drawingml/2006/main">
             <a:pPr algn="l">
-              <a:defRPr sz="1500" b="0">
+              <a:defRPr sz="1725" b="0">
                 <a:solidFill>
                   <a:srgbClr val="17253A"/>
                 </a:solidFill>
@@ -8537,7 +8541,7 @@
               </a:defRPr>
             </a:pPr>
             <a:r>
-              <a:rPr sz="1500" b="0">
+              <a:rPr sz="1725" b="0">
                 <a:solidFill>
                   <a:srgbClr val="17253A"/>
                 </a:solidFill>
@@ -8545,7 +8549,7 @@
                 <a:ea typeface="Arial"/>
                 <a:cs typeface="Arial"/>
               </a:rPr>
-              <a:t>Set up the method: Use proportional reasoning or add then divide for the mean.</a:t>
+              <a:t>Increase = final value - starting value</a:t>
             </a:r>
           </a:p>
         </p:txBody>
@@ -8555,28 +8559,30 @@
           <p:cNvPr id="17" name="">
             <a:extLst xmlns:a="http://schemas.openxmlformats.org/drawingml/2006/main">
               <a:ext uri="{FF2B5EF4-FFF2-40B4-BE49-F238E27FC236}">
-                <a16:creationId xmlns:a16="http://schemas.microsoft.com/office/drawing/2014/main" id="{ED3E6A0A-0AC6-4DF7-ABFE-6C0CDA1D60A8}"/>
-              </a:ext>
-            </a:extLst>
-          </p:cNvPr>
-          <p:cNvSpPr>
-            <a:spLocks xmlns:a="http://schemas.openxmlformats.org/drawingml/2006/main" noGrp="1"/>
-          </p:cNvSpPr>
-          <p:nvPr/>
-        </p:nvSpPr>
-        <p:spPr>
-          <a:xfrm xmlns:a="http://schemas.openxmlformats.org/drawingml/2006/main">
-            <a:off x="1000125" y="3733800"/>
-            <a:ext cx="476250" cy="476250"/>
-          </a:xfrm>
-          <a:prstGeom xmlns:a="http://schemas.openxmlformats.org/drawingml/2006/main" prst="ellipse">
+                <a16:creationId xmlns:a16="http://schemas.microsoft.com/office/drawing/2014/main" id="{3D8297D6-553F-4C1E-A97C-2D07FCBFCCBE}"/>
+              </a:ext>
+            </a:extLst>
+          </p:cNvPr>
+          <p:cNvSpPr>
+            <a:spLocks xmlns:a="http://schemas.openxmlformats.org/drawingml/2006/main" noGrp="1"/>
+          </p:cNvSpPr>
+          <p:nvPr/>
+        </p:nvSpPr>
+        <p:spPr>
+          <a:xfrm xmlns:a="http://schemas.openxmlformats.org/drawingml/2006/main">
+            <a:off x="1714500" y="3819525"/>
+            <a:ext cx="9334500" cy="9525"/>
+          </a:xfrm>
+          <a:prstGeom xmlns:a="http://schemas.openxmlformats.org/drawingml/2006/main" prst="rect">
             <a:avLst/>
           </a:prstGeom>
           <a:solidFill xmlns:a="http://schemas.openxmlformats.org/drawingml/2006/main">
-            <a:srgbClr val="2C6E73"/>
+            <a:srgbClr val="D9E0E6"/>
           </a:solidFill>
           <a:ln xmlns:a="http://schemas.openxmlformats.org/drawingml/2006/main" w="0">
-            <a:noFill/>
+            <a:solidFill>
+              <a:srgbClr val="D9E0E6"/>
+            </a:solidFill>
           </a:ln>
         </p:spPr>
       </p:sp>
@@ -8585,19 +8591,19 @@
           <p:cNvPr id="18" name="">
             <a:extLst xmlns:a="http://schemas.openxmlformats.org/drawingml/2006/main">
               <a:ext uri="{FF2B5EF4-FFF2-40B4-BE49-F238E27FC236}">
-                <a16:creationId xmlns:a16="http://schemas.microsoft.com/office/drawing/2014/main" id="{57050795-8703-4AE9-96B6-42E9ECEA998C}"/>
-              </a:ext>
-            </a:extLst>
-          </p:cNvPr>
-          <p:cNvSpPr>
-            <a:spLocks xmlns:a="http://schemas.openxmlformats.org/drawingml/2006/main" noGrp="1"/>
-          </p:cNvSpPr>
-          <p:nvPr/>
-        </p:nvSpPr>
-        <p:spPr>
-          <a:xfrm xmlns:a="http://schemas.openxmlformats.org/drawingml/2006/main">
-            <a:off x="1000125" y="3762375"/>
-            <a:ext cx="476250" cy="419100"/>
+                <a16:creationId xmlns:a16="http://schemas.microsoft.com/office/drawing/2014/main" id="{93506577-04DC-48E1-AA01-822561FB7FCA}"/>
+              </a:ext>
+            </a:extLst>
+          </p:cNvPr>
+          <p:cNvSpPr>
+            <a:spLocks xmlns:a="http://schemas.openxmlformats.org/drawingml/2006/main" noGrp="1"/>
+          </p:cNvSpPr>
+          <p:nvPr/>
+        </p:nvSpPr>
+        <p:spPr>
+          <a:xfrm xmlns:a="http://schemas.openxmlformats.org/drawingml/2006/main">
+            <a:off x="1162050" y="3952875"/>
+            <a:ext cx="400050" cy="400050"/>
           </a:xfrm>
           <a:prstGeom xmlns:a="http://schemas.openxmlformats.org/drawingml/2006/main" prst="rect">
             <a:avLst/>
@@ -8614,9 +8620,9 @@
           <a:lstStyle xmlns:a="http://schemas.openxmlformats.org/drawingml/2006/main"/>
           <a:p xmlns:a="http://schemas.openxmlformats.org/drawingml/2006/main">
             <a:pPr algn="ctr">
-              <a:defRPr sz="1350" b="1">
-                <a:solidFill>
-                  <a:srgbClr val="FFFFFF"/>
+              <a:defRPr sz="1125" b="1">
+                <a:solidFill>
+                  <a:srgbClr val="2C6E73"/>
                 </a:solidFill>
                 <a:latin typeface="Arial"/>
                 <a:ea typeface="Arial"/>
@@ -8624,9 +8630,9 @@
               </a:defRPr>
             </a:pPr>
             <a:r>
-              <a:rPr sz="1350" b="1">
-                <a:solidFill>
-                  <a:srgbClr val="FFFFFF"/>
+              <a:rPr sz="1125" b="1">
+                <a:solidFill>
+                  <a:srgbClr val="2C6E73"/>
                 </a:solidFill>
                 <a:latin typeface="Arial"/>
                 <a:ea typeface="Arial"/>
@@ -8642,19 +8648,19 @@
           <p:cNvPr id="19" name="">
             <a:extLst xmlns:a="http://schemas.openxmlformats.org/drawingml/2006/main">
               <a:ext uri="{FF2B5EF4-FFF2-40B4-BE49-F238E27FC236}">
-                <a16:creationId xmlns:a16="http://schemas.microsoft.com/office/drawing/2014/main" id="{85195EF0-A4B6-4CA6-93EB-A5C3699A4535}"/>
-              </a:ext>
-            </a:extLst>
-          </p:cNvPr>
-          <p:cNvSpPr>
-            <a:spLocks xmlns:a="http://schemas.openxmlformats.org/drawingml/2006/main" noGrp="1"/>
-          </p:cNvSpPr>
-          <p:nvPr/>
-        </p:nvSpPr>
-        <p:spPr>
-          <a:xfrm xmlns:a="http://schemas.openxmlformats.org/drawingml/2006/main">
-            <a:off x="1714500" y="3667125"/>
-            <a:ext cx="9429750" cy="609600"/>
+                <a16:creationId xmlns:a16="http://schemas.microsoft.com/office/drawing/2014/main" id="{169BB925-B530-40C4-BAFB-C7D425A0F4C4}"/>
+              </a:ext>
+            </a:extLst>
+          </p:cNvPr>
+          <p:cNvSpPr>
+            <a:spLocks xmlns:a="http://schemas.openxmlformats.org/drawingml/2006/main" noGrp="1"/>
+          </p:cNvSpPr>
+          <p:nvPr/>
+        </p:nvSpPr>
+        <p:spPr>
+          <a:xfrm xmlns:a="http://schemas.openxmlformats.org/drawingml/2006/main">
+            <a:off x="1714500" y="3867150"/>
+            <a:ext cx="9525000" cy="809625"/>
           </a:xfrm>
           <a:prstGeom xmlns:a="http://schemas.openxmlformats.org/drawingml/2006/main" prst="rect">
             <a:avLst/>
@@ -8671,7 +8677,7 @@
           <a:lstStyle xmlns:a="http://schemas.openxmlformats.org/drawingml/2006/main"/>
           <a:p xmlns:a="http://schemas.openxmlformats.org/drawingml/2006/main">
             <a:pPr algn="l">
-              <a:defRPr sz="1500" b="0">
+              <a:defRPr sz="1725" b="0">
                 <a:solidFill>
                   <a:srgbClr val="17253A"/>
                 </a:solidFill>
@@ -8681,7 +8687,7 @@
               </a:defRPr>
             </a:pPr>
             <a:r>
-              <a:rPr sz="1500" b="0">
+              <a:rPr sz="1725" b="0">
                 <a:solidFill>
                   <a:srgbClr val="17253A"/>
                 </a:solidFill>
@@ -8689,7 +8695,7 @@
                 <a:ea typeface="Arial"/>
                 <a:cs typeface="Arial"/>
               </a:rPr>
-              <a:t>Complete the calculation: 28.</a:t>
+              <a:t>46 - 18</a:t>
             </a:r>
           </a:p>
         </p:txBody>
@@ -8699,28 +8705,30 @@
           <p:cNvPr id="20" name="">
             <a:extLst xmlns:a="http://schemas.openxmlformats.org/drawingml/2006/main">
               <a:ext uri="{FF2B5EF4-FFF2-40B4-BE49-F238E27FC236}">
-                <a16:creationId xmlns:a16="http://schemas.microsoft.com/office/drawing/2014/main" id="{EDBCF22E-4EBE-4F12-A88A-99C3CFB4D606}"/>
-              </a:ext>
-            </a:extLst>
-          </p:cNvPr>
-          <p:cNvSpPr>
-            <a:spLocks xmlns:a="http://schemas.openxmlformats.org/drawingml/2006/main" noGrp="1"/>
-          </p:cNvSpPr>
-          <p:nvPr/>
-        </p:nvSpPr>
-        <p:spPr>
-          <a:xfrm xmlns:a="http://schemas.openxmlformats.org/drawingml/2006/main">
-            <a:off x="1000125" y="4476750"/>
-            <a:ext cx="476250" cy="476250"/>
-          </a:xfrm>
-          <a:prstGeom xmlns:a="http://schemas.openxmlformats.org/drawingml/2006/main" prst="ellipse">
+                <a16:creationId xmlns:a16="http://schemas.microsoft.com/office/drawing/2014/main" id="{63226251-ED61-4C71-B916-99C21D071EF3}"/>
+              </a:ext>
+            </a:extLst>
+          </p:cNvPr>
+          <p:cNvSpPr>
+            <a:spLocks xmlns:a="http://schemas.openxmlformats.org/drawingml/2006/main" noGrp="1"/>
+          </p:cNvSpPr>
+          <p:nvPr/>
+        </p:nvSpPr>
+        <p:spPr>
+          <a:xfrm xmlns:a="http://schemas.openxmlformats.org/drawingml/2006/main">
+            <a:off x="1714500" y="4695825"/>
+            <a:ext cx="9334500" cy="9525"/>
+          </a:xfrm>
+          <a:prstGeom xmlns:a="http://schemas.openxmlformats.org/drawingml/2006/main" prst="rect">
             <a:avLst/>
           </a:prstGeom>
           <a:solidFill xmlns:a="http://schemas.openxmlformats.org/drawingml/2006/main">
-            <a:srgbClr val="2C6E73"/>
+            <a:srgbClr val="D9E0E6"/>
           </a:solidFill>
           <a:ln xmlns:a="http://schemas.openxmlformats.org/drawingml/2006/main" w="0">
-            <a:noFill/>
+            <a:solidFill>
+              <a:srgbClr val="D9E0E6"/>
+            </a:solidFill>
           </a:ln>
         </p:spPr>
       </p:sp>
@@ -8729,19 +8737,19 @@
           <p:cNvPr id="21" name="">
             <a:extLst xmlns:a="http://schemas.openxmlformats.org/drawingml/2006/main">
               <a:ext uri="{FF2B5EF4-FFF2-40B4-BE49-F238E27FC236}">
-                <a16:creationId xmlns:a16="http://schemas.microsoft.com/office/drawing/2014/main" id="{271A41F9-E3F8-4F68-93B4-D5AC2FE20062}"/>
-              </a:ext>
-            </a:extLst>
-          </p:cNvPr>
-          <p:cNvSpPr>
-            <a:spLocks xmlns:a="http://schemas.openxmlformats.org/drawingml/2006/main" noGrp="1"/>
-          </p:cNvSpPr>
-          <p:nvPr/>
-        </p:nvSpPr>
-        <p:spPr>
-          <a:xfrm xmlns:a="http://schemas.openxmlformats.org/drawingml/2006/main">
-            <a:off x="1000125" y="4505325"/>
-            <a:ext cx="476250" cy="419100"/>
+                <a16:creationId xmlns:a16="http://schemas.microsoft.com/office/drawing/2014/main" id="{20D8C778-F20B-4C73-8778-4F55C30E6A5E}"/>
+              </a:ext>
+            </a:extLst>
+          </p:cNvPr>
+          <p:cNvSpPr>
+            <a:spLocks xmlns:a="http://schemas.openxmlformats.org/drawingml/2006/main" noGrp="1"/>
+          </p:cNvSpPr>
+          <p:nvPr/>
+        </p:nvSpPr>
+        <p:spPr>
+          <a:xfrm xmlns:a="http://schemas.openxmlformats.org/drawingml/2006/main">
+            <a:off x="1162050" y="4829175"/>
+            <a:ext cx="400050" cy="400050"/>
           </a:xfrm>
           <a:prstGeom xmlns:a="http://schemas.openxmlformats.org/drawingml/2006/main" prst="rect">
             <a:avLst/>
@@ -8758,9 +8766,9 @@
           <a:lstStyle xmlns:a="http://schemas.openxmlformats.org/drawingml/2006/main"/>
           <a:p xmlns:a="http://schemas.openxmlformats.org/drawingml/2006/main">
             <a:pPr algn="ctr">
-              <a:defRPr sz="1350" b="1">
-                <a:solidFill>
-                  <a:srgbClr val="FFFFFF"/>
+              <a:defRPr sz="1125" b="1">
+                <a:solidFill>
+                  <a:srgbClr val="2F785D"/>
                 </a:solidFill>
                 <a:latin typeface="Arial"/>
                 <a:ea typeface="Arial"/>
@@ -8768,9 +8776,9 @@
               </a:defRPr>
             </a:pPr>
             <a:r>
-              <a:rPr sz="1350" b="1">
-                <a:solidFill>
-                  <a:srgbClr val="FFFFFF"/>
+              <a:rPr sz="1125" b="1">
+                <a:solidFill>
+                  <a:srgbClr val="2F785D"/>
                 </a:solidFill>
                 <a:latin typeface="Arial"/>
                 <a:ea typeface="Arial"/>
@@ -8786,19 +8794,19 @@
           <p:cNvPr id="22" name="">
             <a:extLst xmlns:a="http://schemas.openxmlformats.org/drawingml/2006/main">
               <a:ext uri="{FF2B5EF4-FFF2-40B4-BE49-F238E27FC236}">
-                <a16:creationId xmlns:a16="http://schemas.microsoft.com/office/drawing/2014/main" id="{191DDC31-FC19-4130-857E-791541A35BA7}"/>
-              </a:ext>
-            </a:extLst>
-          </p:cNvPr>
-          <p:cNvSpPr>
-            <a:spLocks xmlns:a="http://schemas.openxmlformats.org/drawingml/2006/main" noGrp="1"/>
-          </p:cNvSpPr>
-          <p:nvPr/>
-        </p:nvSpPr>
-        <p:spPr>
-          <a:xfrm xmlns:a="http://schemas.openxmlformats.org/drawingml/2006/main">
-            <a:off x="1714500" y="4410075"/>
-            <a:ext cx="9429750" cy="609600"/>
+                <a16:creationId xmlns:a16="http://schemas.microsoft.com/office/drawing/2014/main" id="{DC96B684-C898-48F8-9C3B-72439999C52F}"/>
+              </a:ext>
+            </a:extLst>
+          </p:cNvPr>
+          <p:cNvSpPr>
+            <a:spLocks xmlns:a="http://schemas.openxmlformats.org/drawingml/2006/main" noGrp="1"/>
+          </p:cNvSpPr>
+          <p:nvPr/>
+        </p:nvSpPr>
+        <p:spPr>
+          <a:xfrm xmlns:a="http://schemas.openxmlformats.org/drawingml/2006/main">
+            <a:off x="1714500" y="4743450"/>
+            <a:ext cx="9525000" cy="809625"/>
           </a:xfrm>
           <a:prstGeom xmlns:a="http://schemas.openxmlformats.org/drawingml/2006/main" prst="rect">
             <a:avLst/>
@@ -8815,7 +8823,7 @@
           <a:lstStyle xmlns:a="http://schemas.openxmlformats.org/drawingml/2006/main"/>
           <a:p xmlns:a="http://schemas.openxmlformats.org/drawingml/2006/main">
             <a:pPr algn="l">
-              <a:defRPr sz="1500" b="1">
+              <a:defRPr sz="1725" b="1">
                 <a:solidFill>
                   <a:srgbClr val="2F785D"/>
                 </a:solidFill>
@@ -8825,7 +8833,7 @@
               </a:defRPr>
             </a:pPr>
             <a:r>
-              <a:rPr sz="1500" b="1">
+              <a:rPr sz="1725" b="1">
                 <a:solidFill>
                   <a:srgbClr val="2F785D"/>
                 </a:solidFill>
@@ -8833,7 +8841,7 @@
                 <a:ea typeface="Arial"/>
                 <a:cs typeface="Arial"/>
               </a:rPr>
-              <a:t>Check the result: State the answer in context and check it against the data range.</a:t>
+              <a:t>Increase = 28</a:t>
             </a:r>
           </a:p>
         </p:txBody>
@@ -8841,7 +8849,7 @@
     </p:spTree>
     <p:extLst>
       <p:ext uri="{BB962C8B-B14F-4D97-AF65-F5344CB8AC3E}">
-        <p14:creationId xmlns:p14="http://schemas.microsoft.com/office/powerpoint/2010/main" val="37931370"/>
+        <p14:creationId xmlns:p14="http://schemas.microsoft.com/office/powerpoint/2010/main" val="1667071418"/>
       </p:ext>
     </p:extLst>
   </p:cSld>
@@ -9134,7 +9142,7 @@
           <p:cNvPr id="15" name="">
             <a:extLst xmlns:a="http://schemas.openxmlformats.org/drawingml/2006/main">
               <a:ext uri="{FF2B5EF4-FFF2-40B4-BE49-F238E27FC236}">
-                <a16:creationId xmlns:a16="http://schemas.microsoft.com/office/drawing/2014/main" id="{73675660-8B26-4028-B130-BF375339E008}"/>
+                <a16:creationId xmlns:a16="http://schemas.microsoft.com/office/drawing/2014/main" id="{C2D9AF10-F583-4DBA-985F-43B171131482}"/>
               </a:ext>
             </a:extLst>
           </p:cNvPr>
@@ -9166,7 +9174,7 @@
           <p:cNvPr id="2" name="">
             <a:extLst xmlns:a="http://schemas.openxmlformats.org/drawingml/2006/main">
               <a:ext uri="{FF2B5EF4-FFF2-40B4-BE49-F238E27FC236}">
-                <a16:creationId xmlns:a16="http://schemas.microsoft.com/office/drawing/2014/main" id="{248938D6-8875-4B46-9066-DA824FDD032F}"/>
+                <a16:creationId xmlns:a16="http://schemas.microsoft.com/office/drawing/2014/main" id="{4FABD7EB-7F11-4A81-8300-00219A2C26C2}"/>
               </a:ext>
             </a:extLst>
           </p:cNvPr>
@@ -9223,7 +9231,7 @@
           <p:cNvPr id="3" name="">
             <a:extLst xmlns:a="http://schemas.openxmlformats.org/drawingml/2006/main">
               <a:ext uri="{FF2B5EF4-FFF2-40B4-BE49-F238E27FC236}">
-                <a16:creationId xmlns:a16="http://schemas.microsoft.com/office/drawing/2014/main" id="{A2845032-5B06-4D85-A53D-0456C867F85D}"/>
+                <a16:creationId xmlns:a16="http://schemas.microsoft.com/office/drawing/2014/main" id="{76A466DF-B8B4-4914-8FEB-71B765B2E23A}"/>
               </a:ext>
             </a:extLst>
           </p:cNvPr>
@@ -9255,7 +9263,7 @@
           <p:cNvPr id="4" name="">
             <a:extLst xmlns:a="http://schemas.openxmlformats.org/drawingml/2006/main">
               <a:ext uri="{FF2B5EF4-FFF2-40B4-BE49-F238E27FC236}">
-                <a16:creationId xmlns:a16="http://schemas.microsoft.com/office/drawing/2014/main" id="{B48EA4C2-EBF7-4735-A1BB-A5F4DE35820A}"/>
+                <a16:creationId xmlns:a16="http://schemas.microsoft.com/office/drawing/2014/main" id="{A331ABA3-6363-484C-A625-C33B590E50EF}"/>
               </a:ext>
             </a:extLst>
           </p:cNvPr>
@@ -9312,7 +9320,7 @@
           <p:cNvPr id="5" name="">
             <a:extLst xmlns:a="http://schemas.openxmlformats.org/drawingml/2006/main">
               <a:ext uri="{FF2B5EF4-FFF2-40B4-BE49-F238E27FC236}">
-                <a16:creationId xmlns:a16="http://schemas.microsoft.com/office/drawing/2014/main" id="{BEB89A1E-9728-4C9B-B295-CE0F70218CB3}"/>
+                <a16:creationId xmlns:a16="http://schemas.microsoft.com/office/drawing/2014/main" id="{0E2A18E2-CE24-4613-BAB4-2E16124C781A}"/>
               </a:ext>
             </a:extLst>
           </p:cNvPr>
@@ -9369,7 +9377,7 @@
           <p:cNvPr id="6" name="">
             <a:extLst xmlns:a="http://schemas.openxmlformats.org/drawingml/2006/main">
               <a:ext uri="{FF2B5EF4-FFF2-40B4-BE49-F238E27FC236}">
-                <a16:creationId xmlns:a16="http://schemas.microsoft.com/office/drawing/2014/main" id="{2ED05B83-F1E6-4681-911C-AE3E94C5A27C}"/>
+                <a16:creationId xmlns:a16="http://schemas.microsoft.com/office/drawing/2014/main" id="{5E1FEEB3-C41B-4310-A4EE-203219E11B7F}"/>
               </a:ext>
             </a:extLst>
           </p:cNvPr>
@@ -9426,7 +9434,7 @@
           <p:cNvPr id="7" name="">
             <a:extLst xmlns:a="http://schemas.openxmlformats.org/drawingml/2006/main">
               <a:ext uri="{FF2B5EF4-FFF2-40B4-BE49-F238E27FC236}">
-                <a16:creationId xmlns:a16="http://schemas.microsoft.com/office/drawing/2014/main" id="{73C887FD-B541-4243-9B35-6656EAFF8180}"/>
+                <a16:creationId xmlns:a16="http://schemas.microsoft.com/office/drawing/2014/main" id="{608F5132-0578-438C-AF44-D957A846F760}"/>
               </a:ext>
             </a:extLst>
           </p:cNvPr>
@@ -9458,7 +9466,7 @@
           <p:cNvPr id="8" name="">
             <a:extLst xmlns:a="http://schemas.openxmlformats.org/drawingml/2006/main">
               <a:ext uri="{FF2B5EF4-FFF2-40B4-BE49-F238E27FC236}">
-                <a16:creationId xmlns:a16="http://schemas.microsoft.com/office/drawing/2014/main" id="{CB9C8707-7134-462E-9FB0-64F1F6E67A5C}"/>
+                <a16:creationId xmlns:a16="http://schemas.microsoft.com/office/drawing/2014/main" id="{8C547550-A7FD-4197-AA88-EC9A2770BBB1}"/>
               </a:ext>
             </a:extLst>
           </p:cNvPr>
@@ -9515,7 +9523,7 @@
           <p:cNvPr id="9" name="">
             <a:extLst xmlns:a="http://schemas.openxmlformats.org/drawingml/2006/main">
               <a:ext uri="{FF2B5EF4-FFF2-40B4-BE49-F238E27FC236}">
-                <a16:creationId xmlns:a16="http://schemas.microsoft.com/office/drawing/2014/main" id="{51F7124E-A2D4-4396-B9FF-189A83F9FB23}"/>
+                <a16:creationId xmlns:a16="http://schemas.microsoft.com/office/drawing/2014/main" id="{3A37778B-15A8-4A24-95D8-8E175DAEBB4E}"/>
               </a:ext>
             </a:extLst>
           </p:cNvPr>
@@ -9572,7 +9580,7 @@
           <p:cNvPr id="10" name="">
             <a:extLst xmlns:a="http://schemas.openxmlformats.org/drawingml/2006/main">
               <a:ext uri="{FF2B5EF4-FFF2-40B4-BE49-F238E27FC236}">
-                <a16:creationId xmlns:a16="http://schemas.microsoft.com/office/drawing/2014/main" id="{9F66DC8A-9751-47CC-BB97-98D63AFBD2BE}"/>
+                <a16:creationId xmlns:a16="http://schemas.microsoft.com/office/drawing/2014/main" id="{EBD71866-1A1C-448D-816C-DC97A04E9623}"/>
               </a:ext>
             </a:extLst>
           </p:cNvPr>
@@ -9629,7 +9637,7 @@
           <p:cNvPr id="11" name="">
             <a:extLst xmlns:a="http://schemas.openxmlformats.org/drawingml/2006/main">
               <a:ext uri="{FF2B5EF4-FFF2-40B4-BE49-F238E27FC236}">
-                <a16:creationId xmlns:a16="http://schemas.microsoft.com/office/drawing/2014/main" id="{A8305B7D-A5DE-402D-A57C-BBE3055122A5}"/>
+                <a16:creationId xmlns:a16="http://schemas.microsoft.com/office/drawing/2014/main" id="{FC8BFED7-13FD-471D-8941-CDC76EE8A7DA}"/>
               </a:ext>
             </a:extLst>
           </p:cNvPr>
@@ -9686,7 +9694,7 @@
           <p:cNvPr id="12" name="">
             <a:extLst xmlns:a="http://schemas.openxmlformats.org/drawingml/2006/main">
               <a:ext uri="{FF2B5EF4-FFF2-40B4-BE49-F238E27FC236}">
-                <a16:creationId xmlns:a16="http://schemas.microsoft.com/office/drawing/2014/main" id="{C7DCB52D-DF41-4E3B-ACD3-917859AD5383}"/>
+                <a16:creationId xmlns:a16="http://schemas.microsoft.com/office/drawing/2014/main" id="{E1064786-E2F7-4B40-A4DB-BE98BF66DDB1}"/>
               </a:ext>
             </a:extLst>
           </p:cNvPr>
@@ -9718,7 +9726,7 @@
           <p:cNvPr id="13" name="">
             <a:extLst xmlns:a="http://schemas.openxmlformats.org/drawingml/2006/main">
               <a:ext uri="{FF2B5EF4-FFF2-40B4-BE49-F238E27FC236}">
-                <a16:creationId xmlns:a16="http://schemas.microsoft.com/office/drawing/2014/main" id="{512CFBC8-B1B6-45B7-9DCF-6312054ABD21}"/>
+                <a16:creationId xmlns:a16="http://schemas.microsoft.com/office/drawing/2014/main" id="{7C7460A5-83D7-4175-9B73-5D03F50FB4FC}"/>
               </a:ext>
             </a:extLst>
           </p:cNvPr>
@@ -9775,7 +9783,7 @@
           <p:cNvPr id="14" name="">
             <a:extLst xmlns:a="http://schemas.openxmlformats.org/drawingml/2006/main">
               <a:ext uri="{FF2B5EF4-FFF2-40B4-BE49-F238E27FC236}">
-                <a16:creationId xmlns:a16="http://schemas.microsoft.com/office/drawing/2014/main" id="{011FDDF3-A7E7-48FA-9CF4-23D733957A48}"/>
+                <a16:creationId xmlns:a16="http://schemas.microsoft.com/office/drawing/2014/main" id="{3EB87A27-628C-4476-93DE-74F4F8BAB501}"/>
               </a:ext>
             </a:extLst>
           </p:cNvPr>
@@ -9830,7 +9838,7 @@
     </p:spTree>
     <p:extLst>
       <p:ext uri="{BB962C8B-B14F-4D97-AF65-F5344CB8AC3E}">
-        <p14:creationId xmlns:p14="http://schemas.microsoft.com/office/powerpoint/2010/main" val="432693868"/>
+        <p14:creationId xmlns:p14="http://schemas.microsoft.com/office/powerpoint/2010/main" val="619201993"/>
       </p:ext>
     </p:extLst>
   </p:cSld>
@@ -10031,7 +10039,7 @@
           <p:cNvPr id="16" name="">
             <a:extLst xmlns:a="http://schemas.openxmlformats.org/drawingml/2006/main">
               <a:ext uri="{FF2B5EF4-FFF2-40B4-BE49-F238E27FC236}">
-                <a16:creationId xmlns:a16="http://schemas.microsoft.com/office/drawing/2014/main" id="{FB5855C3-6085-4FAD-AB9C-7CF74084AA95}"/>
+                <a16:creationId xmlns:a16="http://schemas.microsoft.com/office/drawing/2014/main" id="{48FB86BC-7E5E-4AB7-B233-D946F295C102}"/>
               </a:ext>
             </a:extLst>
           </p:cNvPr>
@@ -10063,7 +10071,7 @@
           <p:cNvPr id="2" name="">
             <a:extLst xmlns:a="http://schemas.openxmlformats.org/drawingml/2006/main">
               <a:ext uri="{FF2B5EF4-FFF2-40B4-BE49-F238E27FC236}">
-                <a16:creationId xmlns:a16="http://schemas.microsoft.com/office/drawing/2014/main" id="{6C2B9306-1613-4CD4-8869-B71992C635CF}"/>
+                <a16:creationId xmlns:a16="http://schemas.microsoft.com/office/drawing/2014/main" id="{0E7BE0FD-EBF8-4F4F-8920-4557E23013BB}"/>
               </a:ext>
             </a:extLst>
           </p:cNvPr>
@@ -10120,7 +10128,7 @@
           <p:cNvPr id="3" name="">
             <a:extLst xmlns:a="http://schemas.openxmlformats.org/drawingml/2006/main">
               <a:ext uri="{FF2B5EF4-FFF2-40B4-BE49-F238E27FC236}">
-                <a16:creationId xmlns:a16="http://schemas.microsoft.com/office/drawing/2014/main" id="{54DCE9CE-A3BF-4818-9732-985EDEC915F3}"/>
+                <a16:creationId xmlns:a16="http://schemas.microsoft.com/office/drawing/2014/main" id="{FA83781B-8B4F-4F89-AAA0-5946238DB27E}"/>
               </a:ext>
             </a:extLst>
           </p:cNvPr>
@@ -10152,7 +10160,7 @@
           <p:cNvPr id="4" name="">
             <a:extLst xmlns:a="http://schemas.openxmlformats.org/drawingml/2006/main">
               <a:ext uri="{FF2B5EF4-FFF2-40B4-BE49-F238E27FC236}">
-                <a16:creationId xmlns:a16="http://schemas.microsoft.com/office/drawing/2014/main" id="{B46786FF-2F80-41D0-8F76-91F9036B133E}"/>
+                <a16:creationId xmlns:a16="http://schemas.microsoft.com/office/drawing/2014/main" id="{856E1921-4399-499A-92EF-C8227ACE1A99}"/>
               </a:ext>
             </a:extLst>
           </p:cNvPr>
@@ -10209,7 +10217,7 @@
           <p:cNvPr id="5" name="">
             <a:extLst xmlns:a="http://schemas.openxmlformats.org/drawingml/2006/main">
               <a:ext uri="{FF2B5EF4-FFF2-40B4-BE49-F238E27FC236}">
-                <a16:creationId xmlns:a16="http://schemas.microsoft.com/office/drawing/2014/main" id="{D7702CB1-B758-45A0-8B33-DCF52188AC9B}"/>
+                <a16:creationId xmlns:a16="http://schemas.microsoft.com/office/drawing/2014/main" id="{FBD09BCF-27F5-4818-8147-84A20D7B4547}"/>
               </a:ext>
             </a:extLst>
           </p:cNvPr>
@@ -10266,7 +10274,7 @@
           <p:cNvPr id="6" name="">
             <a:extLst xmlns:a="http://schemas.openxmlformats.org/drawingml/2006/main">
               <a:ext uri="{FF2B5EF4-FFF2-40B4-BE49-F238E27FC236}">
-                <a16:creationId xmlns:a16="http://schemas.microsoft.com/office/drawing/2014/main" id="{2B5C6BAF-3BCE-47A9-BB36-9E268FE7D6E3}"/>
+                <a16:creationId xmlns:a16="http://schemas.microsoft.com/office/drawing/2014/main" id="{A59AEFC4-11FB-46C4-8CC9-2597693120A8}"/>
               </a:ext>
             </a:extLst>
           </p:cNvPr>
@@ -10323,7 +10331,7 @@
           <p:cNvPr id="7" name="">
             <a:extLst xmlns:a="http://schemas.openxmlformats.org/drawingml/2006/main">
               <a:ext uri="{FF2B5EF4-FFF2-40B4-BE49-F238E27FC236}">
-                <a16:creationId xmlns:a16="http://schemas.microsoft.com/office/drawing/2014/main" id="{791A5EAC-1AC9-41F2-8048-F4CB7DD77174}"/>
+                <a16:creationId xmlns:a16="http://schemas.microsoft.com/office/drawing/2014/main" id="{869A213A-8A8A-4197-B878-D70D38D271BB}"/>
               </a:ext>
             </a:extLst>
           </p:cNvPr>
@@ -10355,7 +10363,7 @@
           <p:cNvPr id="8" name="">
             <a:extLst xmlns:a="http://schemas.openxmlformats.org/drawingml/2006/main">
               <a:ext uri="{FF2B5EF4-FFF2-40B4-BE49-F238E27FC236}">
-                <a16:creationId xmlns:a16="http://schemas.microsoft.com/office/drawing/2014/main" id="{261F040B-BB7B-482E-9B34-AF65A0D0C7E1}"/>
+                <a16:creationId xmlns:a16="http://schemas.microsoft.com/office/drawing/2014/main" id="{236B59D7-90D3-427D-A026-7422F04CA7B6}"/>
               </a:ext>
             </a:extLst>
           </p:cNvPr>
@@ -10412,7 +10420,7 @@
           <p:cNvPr id="9" name="">
             <a:extLst xmlns:a="http://schemas.openxmlformats.org/drawingml/2006/main">
               <a:ext uri="{FF2B5EF4-FFF2-40B4-BE49-F238E27FC236}">
-                <a16:creationId xmlns:a16="http://schemas.microsoft.com/office/drawing/2014/main" id="{E645F15E-78EC-4DEE-B1DC-09B9075E5705}"/>
+                <a16:creationId xmlns:a16="http://schemas.microsoft.com/office/drawing/2014/main" id="{D7B00177-CD1E-497F-8C51-69352ED5BC73}"/>
               </a:ext>
             </a:extLst>
           </p:cNvPr>
@@ -10469,7 +10477,7 @@
           <p:cNvPr id="10" name="">
             <a:extLst xmlns:a="http://schemas.openxmlformats.org/drawingml/2006/main">
               <a:ext uri="{FF2B5EF4-FFF2-40B4-BE49-F238E27FC236}">
-                <a16:creationId xmlns:a16="http://schemas.microsoft.com/office/drawing/2014/main" id="{01279FC1-A458-4F00-9207-0C4D03630359}"/>
+                <a16:creationId xmlns:a16="http://schemas.microsoft.com/office/drawing/2014/main" id="{288DB2B6-927B-4241-BB29-243A79FE963D}"/>
               </a:ext>
             </a:extLst>
           </p:cNvPr>
@@ -10526,7 +10534,7 @@
           <p:cNvPr id="11" name="">
             <a:extLst xmlns:a="http://schemas.openxmlformats.org/drawingml/2006/main">
               <a:ext uri="{FF2B5EF4-FFF2-40B4-BE49-F238E27FC236}">
-                <a16:creationId xmlns:a16="http://schemas.microsoft.com/office/drawing/2014/main" id="{5BD2EE39-5F3A-4D3E-A096-13428B9BA6EE}"/>
+                <a16:creationId xmlns:a16="http://schemas.microsoft.com/office/drawing/2014/main" id="{ADCB4522-7338-45FC-A590-AE21146CA126}"/>
               </a:ext>
             </a:extLst>
           </p:cNvPr>
@@ -10583,7 +10591,7 @@
           <p:cNvPr id="12" name="">
             <a:extLst xmlns:a="http://schemas.openxmlformats.org/drawingml/2006/main">
               <a:ext uri="{FF2B5EF4-FFF2-40B4-BE49-F238E27FC236}">
-                <a16:creationId xmlns:a16="http://schemas.microsoft.com/office/drawing/2014/main" id="{9E2A8F58-4D90-4B31-AD93-29D547021A37}"/>
+                <a16:creationId xmlns:a16="http://schemas.microsoft.com/office/drawing/2014/main" id="{4D70227F-3A71-4094-8D94-FB30C73C5F0B}"/>
               </a:ext>
             </a:extLst>
           </p:cNvPr>
@@ -10640,7 +10648,7 @@
           <p:cNvPr id="13" name="">
             <a:extLst xmlns:a="http://schemas.openxmlformats.org/drawingml/2006/main">
               <a:ext uri="{FF2B5EF4-FFF2-40B4-BE49-F238E27FC236}">
-                <a16:creationId xmlns:a16="http://schemas.microsoft.com/office/drawing/2014/main" id="{B7591BC3-5B2C-4B86-BADB-2E55E1AF3E40}"/>
+                <a16:creationId xmlns:a16="http://schemas.microsoft.com/office/drawing/2014/main" id="{4F5CF222-1EB8-4759-BF8D-3D3367476BCC}"/>
               </a:ext>
             </a:extLst>
           </p:cNvPr>
@@ -10697,7 +10705,7 @@
           <p:cNvPr id="14" name="">
             <a:extLst xmlns:a="http://schemas.openxmlformats.org/drawingml/2006/main">
               <a:ext uri="{FF2B5EF4-FFF2-40B4-BE49-F238E27FC236}">
-                <a16:creationId xmlns:a16="http://schemas.microsoft.com/office/drawing/2014/main" id="{FFB4E01B-3B4B-4781-8F40-07BD1FA9B960}"/>
+                <a16:creationId xmlns:a16="http://schemas.microsoft.com/office/drawing/2014/main" id="{D012A581-4F92-4B3E-963B-F64880C0A21B}"/>
               </a:ext>
             </a:extLst>
           </p:cNvPr>
@@ -10754,7 +10762,7 @@
           <p:cNvPr id="15" name="">
             <a:extLst xmlns:a="http://schemas.openxmlformats.org/drawingml/2006/main">
               <a:ext uri="{FF2B5EF4-FFF2-40B4-BE49-F238E27FC236}">
-                <a16:creationId xmlns:a16="http://schemas.microsoft.com/office/drawing/2014/main" id="{6E656B4B-9655-46B8-9770-228B125560A3}"/>
+                <a16:creationId xmlns:a16="http://schemas.microsoft.com/office/drawing/2014/main" id="{CA37EE2E-867E-4FE8-8D4C-FFA8B1B2B98D}"/>
               </a:ext>
             </a:extLst>
           </p:cNvPr>
@@ -10809,7 +10817,7 @@
     </p:spTree>
     <p:extLst>
       <p:ext uri="{BB962C8B-B14F-4D97-AF65-F5344CB8AC3E}">
-        <p14:creationId xmlns:p14="http://schemas.microsoft.com/office/powerpoint/2010/main" val="1985756634"/>
+        <p14:creationId xmlns:p14="http://schemas.microsoft.com/office/powerpoint/2010/main" val="2129843057"/>
       </p:ext>
     </p:extLst>
   </p:cSld>
@@ -10964,7 +10972,7 @@
           <p:cNvPr id="16" name="">
             <a:extLst xmlns:a="http://schemas.openxmlformats.org/drawingml/2006/main">
               <a:ext uri="{FF2B5EF4-FFF2-40B4-BE49-F238E27FC236}">
-                <a16:creationId xmlns:a16="http://schemas.microsoft.com/office/drawing/2014/main" id="{6355FC1D-A332-4949-807F-BC60AA6B9B8A}"/>
+                <a16:creationId xmlns:a16="http://schemas.microsoft.com/office/drawing/2014/main" id="{9B3C2876-F5A3-4CD9-81F2-0202BF315A32}"/>
               </a:ext>
             </a:extLst>
           </p:cNvPr>
@@ -10996,7 +11004,7 @@
           <p:cNvPr id="2" name="">
             <a:extLst xmlns:a="http://schemas.openxmlformats.org/drawingml/2006/main">
               <a:ext uri="{FF2B5EF4-FFF2-40B4-BE49-F238E27FC236}">
-                <a16:creationId xmlns:a16="http://schemas.microsoft.com/office/drawing/2014/main" id="{7FC30374-F132-431B-95A1-9499684E4C1B}"/>
+                <a16:creationId xmlns:a16="http://schemas.microsoft.com/office/drawing/2014/main" id="{E6ABDFA4-298C-4111-82C2-C449999D28A0}"/>
               </a:ext>
             </a:extLst>
           </p:cNvPr>
@@ -11053,7 +11061,7 @@
           <p:cNvPr id="3" name="">
             <a:extLst xmlns:a="http://schemas.openxmlformats.org/drawingml/2006/main">
               <a:ext uri="{FF2B5EF4-FFF2-40B4-BE49-F238E27FC236}">
-                <a16:creationId xmlns:a16="http://schemas.microsoft.com/office/drawing/2014/main" id="{6F66C8D5-BC50-40F7-87CB-07491EBB5E00}"/>
+                <a16:creationId xmlns:a16="http://schemas.microsoft.com/office/drawing/2014/main" id="{96546C89-AE7C-4EDA-A2B9-A75101553097}"/>
               </a:ext>
             </a:extLst>
           </p:cNvPr>
@@ -11085,7 +11093,7 @@
           <p:cNvPr id="4" name="">
             <a:extLst xmlns:a="http://schemas.openxmlformats.org/drawingml/2006/main">
               <a:ext uri="{FF2B5EF4-FFF2-40B4-BE49-F238E27FC236}">
-                <a16:creationId xmlns:a16="http://schemas.microsoft.com/office/drawing/2014/main" id="{63D97C24-56AA-4F7C-A3F2-C93605738B87}"/>
+                <a16:creationId xmlns:a16="http://schemas.microsoft.com/office/drawing/2014/main" id="{FFBBDD5D-296E-40C1-86F8-932141D639FC}"/>
               </a:ext>
             </a:extLst>
           </p:cNvPr>
@@ -11142,7 +11150,7 @@
           <p:cNvPr id="5" name="">
             <a:extLst xmlns:a="http://schemas.openxmlformats.org/drawingml/2006/main">
               <a:ext uri="{FF2B5EF4-FFF2-40B4-BE49-F238E27FC236}">
-                <a16:creationId xmlns:a16="http://schemas.microsoft.com/office/drawing/2014/main" id="{C20E1E8A-ED73-4FF7-B5C7-2F9A861C0D9A}"/>
+                <a16:creationId xmlns:a16="http://schemas.microsoft.com/office/drawing/2014/main" id="{A73B34BC-D19F-43D2-9F75-208492682BEC}"/>
               </a:ext>
             </a:extLst>
           </p:cNvPr>
@@ -11199,7 +11207,7 @@
           <p:cNvPr id="6" name="">
             <a:extLst xmlns:a="http://schemas.openxmlformats.org/drawingml/2006/main">
               <a:ext uri="{FF2B5EF4-FFF2-40B4-BE49-F238E27FC236}">
-                <a16:creationId xmlns:a16="http://schemas.microsoft.com/office/drawing/2014/main" id="{861C44E7-7719-4203-9F3E-B454D9A2F8CF}"/>
+                <a16:creationId xmlns:a16="http://schemas.microsoft.com/office/drawing/2014/main" id="{B1E06597-016B-4B17-AAA2-152B080A5165}"/>
               </a:ext>
             </a:extLst>
           </p:cNvPr>
@@ -11256,7 +11264,7 @@
           <p:cNvPr id="7" name="">
             <a:extLst xmlns:a="http://schemas.openxmlformats.org/drawingml/2006/main">
               <a:ext uri="{FF2B5EF4-FFF2-40B4-BE49-F238E27FC236}">
-                <a16:creationId xmlns:a16="http://schemas.microsoft.com/office/drawing/2014/main" id="{65922FD0-2F0C-4DA5-A77C-05979A4175C2}"/>
+                <a16:creationId xmlns:a16="http://schemas.microsoft.com/office/drawing/2014/main" id="{7C0B8228-288D-49BB-A1AB-922119DAE85E}"/>
               </a:ext>
             </a:extLst>
           </p:cNvPr>
@@ -11288,7 +11296,7 @@
           <p:cNvPr id="8" name="">
             <a:extLst xmlns:a="http://schemas.openxmlformats.org/drawingml/2006/main">
               <a:ext uri="{FF2B5EF4-FFF2-40B4-BE49-F238E27FC236}">
-                <a16:creationId xmlns:a16="http://schemas.microsoft.com/office/drawing/2014/main" id="{FF707C56-E26E-428D-969D-4E4235C940C1}"/>
+                <a16:creationId xmlns:a16="http://schemas.microsoft.com/office/drawing/2014/main" id="{B0151149-583A-4652-B697-546AAD4E0129}"/>
               </a:ext>
             </a:extLst>
           </p:cNvPr>
@@ -11345,7 +11353,7 @@
           <p:cNvPr id="9" name="">
             <a:extLst xmlns:a="http://schemas.openxmlformats.org/drawingml/2006/main">
               <a:ext uri="{FF2B5EF4-FFF2-40B4-BE49-F238E27FC236}">
-                <a16:creationId xmlns:a16="http://schemas.microsoft.com/office/drawing/2014/main" id="{CE6E0847-166F-4B45-9FDB-51C74767EFF4}"/>
+                <a16:creationId xmlns:a16="http://schemas.microsoft.com/office/drawing/2014/main" id="{7FAFD0C3-EDCA-476B-8F5B-F9904D7363EE}"/>
               </a:ext>
             </a:extLst>
           </p:cNvPr>
@@ -11406,7 +11414,7 @@
           <p:nvPr/>
         </p:nvPicPr>
         <p:blipFill>
-          <a:blip xmlns:r="http://schemas.openxmlformats.org/officeDocument/2006/relationships" xmlns:a="http://schemas.openxmlformats.org/drawingml/2006/main" r:embed="R7f658d1b80f04ce3"/>
+          <a:blip xmlns:r="http://schemas.openxmlformats.org/officeDocument/2006/relationships" xmlns:a="http://schemas.openxmlformats.org/drawingml/2006/main" r:embed="Rbe80e8e0e1694e7b"/>
           <a:stretch xmlns:a="http://schemas.openxmlformats.org/drawingml/2006/main"/>
         </p:blipFill>
         <p:spPr>
@@ -11424,7 +11432,7 @@
           <p:cNvPr id="11" name="">
             <a:extLst xmlns:a="http://schemas.openxmlformats.org/drawingml/2006/main">
               <a:ext uri="{FF2B5EF4-FFF2-40B4-BE49-F238E27FC236}">
-                <a16:creationId xmlns:a16="http://schemas.microsoft.com/office/drawing/2014/main" id="{0BA2776C-B492-4FA2-AD18-F2BCB53B0BA3}"/>
+                <a16:creationId xmlns:a16="http://schemas.microsoft.com/office/drawing/2014/main" id="{06E2B51E-216E-4C12-B47F-0827E2BB7765}"/>
               </a:ext>
             </a:extLst>
           </p:cNvPr>
@@ -11481,7 +11489,7 @@
           <p:cNvPr id="12" name="">
             <a:extLst xmlns:a="http://schemas.openxmlformats.org/drawingml/2006/main">
               <a:ext uri="{FF2B5EF4-FFF2-40B4-BE49-F238E27FC236}">
-                <a16:creationId xmlns:a16="http://schemas.microsoft.com/office/drawing/2014/main" id="{D190AB97-F1E8-4B5D-AD67-78045447367D}"/>
+                <a16:creationId xmlns:a16="http://schemas.microsoft.com/office/drawing/2014/main" id="{B86FA428-FC33-4F48-804A-80EF14B7B35F}"/>
               </a:ext>
             </a:extLst>
           </p:cNvPr>
@@ -11538,7 +11546,7 @@
           <p:cNvPr id="13" name="">
             <a:extLst xmlns:a="http://schemas.openxmlformats.org/drawingml/2006/main">
               <a:ext uri="{FF2B5EF4-FFF2-40B4-BE49-F238E27FC236}">
-                <a16:creationId xmlns:a16="http://schemas.microsoft.com/office/drawing/2014/main" id="{524EE4EC-A47F-4D13-8CFB-391AF580C470}"/>
+                <a16:creationId xmlns:a16="http://schemas.microsoft.com/office/drawing/2014/main" id="{F48CD242-B71E-4573-B202-1760D5FBCA98}"/>
               </a:ext>
             </a:extLst>
           </p:cNvPr>
@@ -11570,7 +11578,7 @@
           <p:cNvPr id="14" name="">
             <a:extLst xmlns:a="http://schemas.openxmlformats.org/drawingml/2006/main">
               <a:ext uri="{FF2B5EF4-FFF2-40B4-BE49-F238E27FC236}">
-                <a16:creationId xmlns:a16="http://schemas.microsoft.com/office/drawing/2014/main" id="{A8EBCE44-8A02-44A2-A69E-B2BBC890EE22}"/>
+                <a16:creationId xmlns:a16="http://schemas.microsoft.com/office/drawing/2014/main" id="{F897D537-8585-462E-8FF7-33AF81950803}"/>
               </a:ext>
             </a:extLst>
           </p:cNvPr>
@@ -11627,7 +11635,7 @@
           <p:cNvPr id="15" name="">
             <a:extLst xmlns:a="http://schemas.openxmlformats.org/drawingml/2006/main">
               <a:ext uri="{FF2B5EF4-FFF2-40B4-BE49-F238E27FC236}">
-                <a16:creationId xmlns:a16="http://schemas.microsoft.com/office/drawing/2014/main" id="{B052B403-E6DE-4FFA-AB01-AFC32BE82B3C}"/>
+                <a16:creationId xmlns:a16="http://schemas.microsoft.com/office/drawing/2014/main" id="{9D093825-9D2C-4D43-9607-4864C1B9A949}"/>
               </a:ext>
             </a:extLst>
           </p:cNvPr>
@@ -11682,7 +11690,7 @@
     </p:spTree>
     <p:extLst>
       <p:ext uri="{BB962C8B-B14F-4D97-AF65-F5344CB8AC3E}">
-        <p14:creationId xmlns:p14="http://schemas.microsoft.com/office/powerpoint/2010/main" val="645636755"/>
+        <p14:creationId xmlns:p14="http://schemas.microsoft.com/office/powerpoint/2010/main" val="1999937113"/>
       </p:ext>
     </p:extLst>
   </p:cSld>
@@ -11837,7 +11845,7 @@
           <p:cNvPr id="23" name="">
             <a:extLst xmlns:a="http://schemas.openxmlformats.org/drawingml/2006/main">
               <a:ext uri="{FF2B5EF4-FFF2-40B4-BE49-F238E27FC236}">
-                <a16:creationId xmlns:a16="http://schemas.microsoft.com/office/drawing/2014/main" id="{330559A3-66CE-4399-B863-059B13138301}"/>
+                <a16:creationId xmlns:a16="http://schemas.microsoft.com/office/drawing/2014/main" id="{C0797D14-E957-4319-A37C-9645C6142535}"/>
               </a:ext>
             </a:extLst>
           </p:cNvPr>
@@ -11869,7 +11877,7 @@
           <p:cNvPr id="2" name="">
             <a:extLst xmlns:a="http://schemas.openxmlformats.org/drawingml/2006/main">
               <a:ext uri="{FF2B5EF4-FFF2-40B4-BE49-F238E27FC236}">
-                <a16:creationId xmlns:a16="http://schemas.microsoft.com/office/drawing/2014/main" id="{9BDA86B1-ED97-4726-88EC-C9A5A0A11DB5}"/>
+                <a16:creationId xmlns:a16="http://schemas.microsoft.com/office/drawing/2014/main" id="{5890C095-4D23-47AB-A098-2C0BA317879D}"/>
               </a:ext>
             </a:extLst>
           </p:cNvPr>
@@ -11926,7 +11934,7 @@
           <p:cNvPr id="3" name="">
             <a:extLst xmlns:a="http://schemas.openxmlformats.org/drawingml/2006/main">
               <a:ext uri="{FF2B5EF4-FFF2-40B4-BE49-F238E27FC236}">
-                <a16:creationId xmlns:a16="http://schemas.microsoft.com/office/drawing/2014/main" id="{24553A97-6733-4DF1-AE68-AE1C01FA5140}"/>
+                <a16:creationId xmlns:a16="http://schemas.microsoft.com/office/drawing/2014/main" id="{39A70BFE-D84F-4DB4-8281-9EF92DEEB6ED}"/>
               </a:ext>
             </a:extLst>
           </p:cNvPr>
@@ -11958,7 +11966,7 @@
           <p:cNvPr id="4" name="">
             <a:extLst xmlns:a="http://schemas.openxmlformats.org/drawingml/2006/main">
               <a:ext uri="{FF2B5EF4-FFF2-40B4-BE49-F238E27FC236}">
-                <a16:creationId xmlns:a16="http://schemas.microsoft.com/office/drawing/2014/main" id="{BFB83F18-8FE4-4496-ACB0-00F96BA7AECC}"/>
+                <a16:creationId xmlns:a16="http://schemas.microsoft.com/office/drawing/2014/main" id="{76C1BED0-C22D-4EE3-BA79-CD6E5EC6E30F}"/>
               </a:ext>
             </a:extLst>
           </p:cNvPr>
@@ -12015,7 +12023,7 @@
           <p:cNvPr id="5" name="">
             <a:extLst xmlns:a="http://schemas.openxmlformats.org/drawingml/2006/main">
               <a:ext uri="{FF2B5EF4-FFF2-40B4-BE49-F238E27FC236}">
-                <a16:creationId xmlns:a16="http://schemas.microsoft.com/office/drawing/2014/main" id="{8725A420-69A9-4A02-BC50-31D5777D4FB0}"/>
+                <a16:creationId xmlns:a16="http://schemas.microsoft.com/office/drawing/2014/main" id="{FD11F10E-8197-4B81-B07C-F1EC02C332E0}"/>
               </a:ext>
             </a:extLst>
           </p:cNvPr>
@@ -12072,7 +12080,7 @@
           <p:cNvPr id="6" name="">
             <a:extLst xmlns:a="http://schemas.openxmlformats.org/drawingml/2006/main">
               <a:ext uri="{FF2B5EF4-FFF2-40B4-BE49-F238E27FC236}">
-                <a16:creationId xmlns:a16="http://schemas.microsoft.com/office/drawing/2014/main" id="{A02EBA5F-60E5-4385-A7D8-E152878D4261}"/>
+                <a16:creationId xmlns:a16="http://schemas.microsoft.com/office/drawing/2014/main" id="{3EDABF1B-581B-4FD0-8D13-176D143858F5}"/>
               </a:ext>
             </a:extLst>
           </p:cNvPr>
@@ -12129,7 +12137,7 @@
           <p:cNvPr id="7" name="">
             <a:extLst xmlns:a="http://schemas.openxmlformats.org/drawingml/2006/main">
               <a:ext uri="{FF2B5EF4-FFF2-40B4-BE49-F238E27FC236}">
-                <a16:creationId xmlns:a16="http://schemas.microsoft.com/office/drawing/2014/main" id="{F3C07F9D-D6EF-4827-B368-C6EFAE7335A8}"/>
+                <a16:creationId xmlns:a16="http://schemas.microsoft.com/office/drawing/2014/main" id="{DA0F7586-CBD7-4C82-B5CC-493DA1B5BEC3}"/>
               </a:ext>
             </a:extLst>
           </p:cNvPr>
@@ -12161,7 +12169,7 @@
           <p:cNvPr id="8" name="">
             <a:extLst xmlns:a="http://schemas.openxmlformats.org/drawingml/2006/main">
               <a:ext uri="{FF2B5EF4-FFF2-40B4-BE49-F238E27FC236}">
-                <a16:creationId xmlns:a16="http://schemas.microsoft.com/office/drawing/2014/main" id="{FFD7439F-904E-428C-8467-2BFAB35334C3}"/>
+                <a16:creationId xmlns:a16="http://schemas.microsoft.com/office/drawing/2014/main" id="{7DF1E93E-651A-4CF2-A1D0-FF546312888E}"/>
               </a:ext>
             </a:extLst>
           </p:cNvPr>
@@ -12218,7 +12226,7 @@
           <p:cNvPr id="9" name="">
             <a:extLst xmlns:a="http://schemas.openxmlformats.org/drawingml/2006/main">
               <a:ext uri="{FF2B5EF4-FFF2-40B4-BE49-F238E27FC236}">
-                <a16:creationId xmlns:a16="http://schemas.microsoft.com/office/drawing/2014/main" id="{60AD2CF9-E7BD-42A2-B5EC-FC2D3FA961DD}"/>
+                <a16:creationId xmlns:a16="http://schemas.microsoft.com/office/drawing/2014/main" id="{AF852AB5-0A5C-489D-A86B-0198AB04CEC6}"/>
               </a:ext>
             </a:extLst>
           </p:cNvPr>
@@ -12275,7 +12283,7 @@
           <p:cNvPr id="10" name="">
             <a:extLst xmlns:a="http://schemas.openxmlformats.org/drawingml/2006/main">
               <a:ext uri="{FF2B5EF4-FFF2-40B4-BE49-F238E27FC236}">
-                <a16:creationId xmlns:a16="http://schemas.microsoft.com/office/drawing/2014/main" id="{3B7E22C6-6F57-4858-AA1F-913221CE4CBE}"/>
+                <a16:creationId xmlns:a16="http://schemas.microsoft.com/office/drawing/2014/main" id="{6E4B2C9E-1D33-4E30-9D83-2971DB42A8C5}"/>
               </a:ext>
             </a:extLst>
           </p:cNvPr>
@@ -12309,7 +12317,7 @@
           <p:cNvPr id="11" name="">
             <a:extLst xmlns:a="http://schemas.openxmlformats.org/drawingml/2006/main">
               <a:ext uri="{FF2B5EF4-FFF2-40B4-BE49-F238E27FC236}">
-                <a16:creationId xmlns:a16="http://schemas.microsoft.com/office/drawing/2014/main" id="{4E7053EE-CE6C-4450-B40A-8650C6D425DD}"/>
+                <a16:creationId xmlns:a16="http://schemas.microsoft.com/office/drawing/2014/main" id="{9D3AE529-0306-497C-BB8F-A8BAF6CEA255}"/>
               </a:ext>
             </a:extLst>
           </p:cNvPr>
@@ -12341,7 +12349,7 @@
           <p:cNvPr id="12" name="">
             <a:extLst xmlns:a="http://schemas.openxmlformats.org/drawingml/2006/main">
               <a:ext uri="{FF2B5EF4-FFF2-40B4-BE49-F238E27FC236}">
-                <a16:creationId xmlns:a16="http://schemas.microsoft.com/office/drawing/2014/main" id="{C687CA38-6E0A-4A39-968B-3378AB13B2D0}"/>
+                <a16:creationId xmlns:a16="http://schemas.microsoft.com/office/drawing/2014/main" id="{B3DF3F85-FD16-497B-9FC5-8A147B2C689C}"/>
               </a:ext>
             </a:extLst>
           </p:cNvPr>
@@ -12398,7 +12406,7 @@
           <p:cNvPr id="13" name="">
             <a:extLst xmlns:a="http://schemas.openxmlformats.org/drawingml/2006/main">
               <a:ext uri="{FF2B5EF4-FFF2-40B4-BE49-F238E27FC236}">
-                <a16:creationId xmlns:a16="http://schemas.microsoft.com/office/drawing/2014/main" id="{0C435E43-E77A-4B55-B365-D4588F186D33}"/>
+                <a16:creationId xmlns:a16="http://schemas.microsoft.com/office/drawing/2014/main" id="{D4A1FF27-BC91-4B9D-AE72-08BECFC4C796}"/>
               </a:ext>
             </a:extLst>
           </p:cNvPr>
@@ -12455,7 +12463,7 @@
           <p:cNvPr id="14" name="">
             <a:extLst xmlns:a="http://schemas.openxmlformats.org/drawingml/2006/main">
               <a:ext uri="{FF2B5EF4-FFF2-40B4-BE49-F238E27FC236}">
-                <a16:creationId xmlns:a16="http://schemas.microsoft.com/office/drawing/2014/main" id="{B7B05260-DA79-4EBC-984F-B6D04330B206}"/>
+                <a16:creationId xmlns:a16="http://schemas.microsoft.com/office/drawing/2014/main" id="{EAB2776E-ECBB-46B2-9391-2A3E03651404}"/>
               </a:ext>
             </a:extLst>
           </p:cNvPr>
@@ -12489,7 +12497,7 @@
           <p:cNvPr id="15" name="">
             <a:extLst xmlns:a="http://schemas.openxmlformats.org/drawingml/2006/main">
               <a:ext uri="{FF2B5EF4-FFF2-40B4-BE49-F238E27FC236}">
-                <a16:creationId xmlns:a16="http://schemas.microsoft.com/office/drawing/2014/main" id="{78C7929D-BBAF-4B6B-A7A5-D8B4098B02B2}"/>
+                <a16:creationId xmlns:a16="http://schemas.microsoft.com/office/drawing/2014/main" id="{EB222523-3903-4626-A504-5E9D0C8545F6}"/>
               </a:ext>
             </a:extLst>
           </p:cNvPr>
@@ -12521,7 +12529,7 @@
           <p:cNvPr id="16" name="">
             <a:extLst xmlns:a="http://schemas.openxmlformats.org/drawingml/2006/main">
               <a:ext uri="{FF2B5EF4-FFF2-40B4-BE49-F238E27FC236}">
-                <a16:creationId xmlns:a16="http://schemas.microsoft.com/office/drawing/2014/main" id="{7FE53E7D-30E2-4156-B748-BEBC85903AA0}"/>
+                <a16:creationId xmlns:a16="http://schemas.microsoft.com/office/drawing/2014/main" id="{FC65616D-ADAC-49DF-BD8D-F8668939FF0C}"/>
               </a:ext>
             </a:extLst>
           </p:cNvPr>
@@ -12578,7 +12586,7 @@
           <p:cNvPr id="17" name="">
             <a:extLst xmlns:a="http://schemas.openxmlformats.org/drawingml/2006/main">
               <a:ext uri="{FF2B5EF4-FFF2-40B4-BE49-F238E27FC236}">
-                <a16:creationId xmlns:a16="http://schemas.microsoft.com/office/drawing/2014/main" id="{E5F03F09-C62D-4954-95DB-9E019268755D}"/>
+                <a16:creationId xmlns:a16="http://schemas.microsoft.com/office/drawing/2014/main" id="{2B686243-98A5-4D6B-8C08-E133507433AC}"/>
               </a:ext>
             </a:extLst>
           </p:cNvPr>
@@ -12635,7 +12643,7 @@
           <p:cNvPr id="18" name="">
             <a:extLst xmlns:a="http://schemas.openxmlformats.org/drawingml/2006/main">
               <a:ext uri="{FF2B5EF4-FFF2-40B4-BE49-F238E27FC236}">
-                <a16:creationId xmlns:a16="http://schemas.microsoft.com/office/drawing/2014/main" id="{9A54BE6E-A010-4799-B147-F30435E96DF5}"/>
+                <a16:creationId xmlns:a16="http://schemas.microsoft.com/office/drawing/2014/main" id="{8E384A3A-A0B0-4FE8-9819-5B2B19524F49}"/>
               </a:ext>
             </a:extLst>
           </p:cNvPr>
@@ -12669,7 +12677,7 @@
           <p:cNvPr id="19" name="">
             <a:extLst xmlns:a="http://schemas.openxmlformats.org/drawingml/2006/main">
               <a:ext uri="{FF2B5EF4-FFF2-40B4-BE49-F238E27FC236}">
-                <a16:creationId xmlns:a16="http://schemas.microsoft.com/office/drawing/2014/main" id="{38722728-BAC2-4208-87D6-C3FA352F0398}"/>
+                <a16:creationId xmlns:a16="http://schemas.microsoft.com/office/drawing/2014/main" id="{5A07C9D4-5A52-47AA-B862-5F626E7E0606}"/>
               </a:ext>
             </a:extLst>
           </p:cNvPr>
@@ -12701,7 +12709,7 @@
           <p:cNvPr id="20" name="">
             <a:extLst xmlns:a="http://schemas.openxmlformats.org/drawingml/2006/main">
               <a:ext uri="{FF2B5EF4-FFF2-40B4-BE49-F238E27FC236}">
-                <a16:creationId xmlns:a16="http://schemas.microsoft.com/office/drawing/2014/main" id="{60D89D5A-5EFC-4FC9-AEB0-C5BE6FCB7986}"/>
+                <a16:creationId xmlns:a16="http://schemas.microsoft.com/office/drawing/2014/main" id="{078E9877-5CC6-4D38-8906-5FA099A9E26C}"/>
               </a:ext>
             </a:extLst>
           </p:cNvPr>
@@ -12758,7 +12766,7 @@
           <p:cNvPr id="21" name="">
             <a:extLst xmlns:a="http://schemas.openxmlformats.org/drawingml/2006/main">
               <a:ext uri="{FF2B5EF4-FFF2-40B4-BE49-F238E27FC236}">
-                <a16:creationId xmlns:a16="http://schemas.microsoft.com/office/drawing/2014/main" id="{AA3E2A56-3816-4918-A94C-095F7C5842E0}"/>
+                <a16:creationId xmlns:a16="http://schemas.microsoft.com/office/drawing/2014/main" id="{3193FFCF-F067-49AF-A113-81E521577EFD}"/>
               </a:ext>
             </a:extLst>
           </p:cNvPr>
@@ -12815,7 +12823,7 @@
           <p:cNvPr id="22" name="">
             <a:extLst xmlns:a="http://schemas.openxmlformats.org/drawingml/2006/main">
               <a:ext uri="{FF2B5EF4-FFF2-40B4-BE49-F238E27FC236}">
-                <a16:creationId xmlns:a16="http://schemas.microsoft.com/office/drawing/2014/main" id="{E7523C9F-6A86-4A37-A4FA-DB2FD23C8CB9}"/>
+                <a16:creationId xmlns:a16="http://schemas.microsoft.com/office/drawing/2014/main" id="{50B57849-E6F9-41AD-9D2C-FD9B9435FC65}"/>
               </a:ext>
             </a:extLst>
           </p:cNvPr>
@@ -12870,7 +12878,7 @@
     </p:spTree>
     <p:extLst>
       <p:ext uri="{BB962C8B-B14F-4D97-AF65-F5344CB8AC3E}">
-        <p14:creationId xmlns:p14="http://schemas.microsoft.com/office/powerpoint/2010/main" val="1614636639"/>
+        <p14:creationId xmlns:p14="http://schemas.microsoft.com/office/powerpoint/2010/main" val="1355637425"/>
       </p:ext>
     </p:extLst>
   </p:cSld>
@@ -13071,7 +13079,7 @@
           <p:cNvPr id="22" name="">
             <a:extLst xmlns:a="http://schemas.openxmlformats.org/drawingml/2006/main">
               <a:ext uri="{FF2B5EF4-FFF2-40B4-BE49-F238E27FC236}">
-                <a16:creationId xmlns:a16="http://schemas.microsoft.com/office/drawing/2014/main" id="{0A508530-732C-4898-A787-E2A5935AF0B5}"/>
+                <a16:creationId xmlns:a16="http://schemas.microsoft.com/office/drawing/2014/main" id="{DC0FF85D-8C83-4FA5-A4DC-2DCF276AB3FD}"/>
               </a:ext>
             </a:extLst>
           </p:cNvPr>
@@ -13103,7 +13111,7 @@
           <p:cNvPr id="2" name="">
             <a:extLst xmlns:a="http://schemas.openxmlformats.org/drawingml/2006/main">
               <a:ext uri="{FF2B5EF4-FFF2-40B4-BE49-F238E27FC236}">
-                <a16:creationId xmlns:a16="http://schemas.microsoft.com/office/drawing/2014/main" id="{DD12BDEA-98EA-4D29-8266-CF67DAA61027}"/>
+                <a16:creationId xmlns:a16="http://schemas.microsoft.com/office/drawing/2014/main" id="{155A613E-602E-4B59-83F4-49875FEC2147}"/>
               </a:ext>
             </a:extLst>
           </p:cNvPr>
@@ -13160,7 +13168,7 @@
           <p:cNvPr id="3" name="">
             <a:extLst xmlns:a="http://schemas.openxmlformats.org/drawingml/2006/main">
               <a:ext uri="{FF2B5EF4-FFF2-40B4-BE49-F238E27FC236}">
-                <a16:creationId xmlns:a16="http://schemas.microsoft.com/office/drawing/2014/main" id="{9D12F956-081F-4F2B-AABE-0A73F1149364}"/>
+                <a16:creationId xmlns:a16="http://schemas.microsoft.com/office/drawing/2014/main" id="{60CD322A-AF1D-4895-A2D0-147E6E342EE3}"/>
               </a:ext>
             </a:extLst>
           </p:cNvPr>
@@ -13192,7 +13200,7 @@
           <p:cNvPr id="4" name="">
             <a:extLst xmlns:a="http://schemas.openxmlformats.org/drawingml/2006/main">
               <a:ext uri="{FF2B5EF4-FFF2-40B4-BE49-F238E27FC236}">
-                <a16:creationId xmlns:a16="http://schemas.microsoft.com/office/drawing/2014/main" id="{BCEDE25D-11DB-4264-8705-E05A5250CC5E}"/>
+                <a16:creationId xmlns:a16="http://schemas.microsoft.com/office/drawing/2014/main" id="{9A5611C5-E928-4649-B32E-D2F9624C1396}"/>
               </a:ext>
             </a:extLst>
           </p:cNvPr>
@@ -13249,7 +13257,7 @@
           <p:cNvPr id="5" name="">
             <a:extLst xmlns:a="http://schemas.openxmlformats.org/drawingml/2006/main">
               <a:ext uri="{FF2B5EF4-FFF2-40B4-BE49-F238E27FC236}">
-                <a16:creationId xmlns:a16="http://schemas.microsoft.com/office/drawing/2014/main" id="{A5A8F706-B680-41FE-A196-2E5551D0F9B9}"/>
+                <a16:creationId xmlns:a16="http://schemas.microsoft.com/office/drawing/2014/main" id="{DD32D111-EDEC-4357-BC7C-4A30B2C3E897}"/>
               </a:ext>
             </a:extLst>
           </p:cNvPr>
@@ -13306,7 +13314,7 @@
           <p:cNvPr id="6" name="">
             <a:extLst xmlns:a="http://schemas.openxmlformats.org/drawingml/2006/main">
               <a:ext uri="{FF2B5EF4-FFF2-40B4-BE49-F238E27FC236}">
-                <a16:creationId xmlns:a16="http://schemas.microsoft.com/office/drawing/2014/main" id="{ECDE2E18-673B-43CC-A917-C083859E568F}"/>
+                <a16:creationId xmlns:a16="http://schemas.microsoft.com/office/drawing/2014/main" id="{6484484D-8A7E-49CE-A9C9-92C4DA7E7B25}"/>
               </a:ext>
             </a:extLst>
           </p:cNvPr>
@@ -13363,7 +13371,7 @@
           <p:cNvPr id="7" name="">
             <a:extLst xmlns:a="http://schemas.openxmlformats.org/drawingml/2006/main">
               <a:ext uri="{FF2B5EF4-FFF2-40B4-BE49-F238E27FC236}">
-                <a16:creationId xmlns:a16="http://schemas.microsoft.com/office/drawing/2014/main" id="{0C76563D-4DF1-49EA-86A2-751C55DD5D1D}"/>
+                <a16:creationId xmlns:a16="http://schemas.microsoft.com/office/drawing/2014/main" id="{3C436953-F069-4EB0-9B32-AB950AFFF730}"/>
               </a:ext>
             </a:extLst>
           </p:cNvPr>
@@ -13395,7 +13403,7 @@
           <p:cNvPr id="8" name="">
             <a:extLst xmlns:a="http://schemas.openxmlformats.org/drawingml/2006/main">
               <a:ext uri="{FF2B5EF4-FFF2-40B4-BE49-F238E27FC236}">
-                <a16:creationId xmlns:a16="http://schemas.microsoft.com/office/drawing/2014/main" id="{55D9D4BF-9E2D-4C43-8E87-5684AE11D774}"/>
+                <a16:creationId xmlns:a16="http://schemas.microsoft.com/office/drawing/2014/main" id="{6A701FF8-3157-4CC1-B1E7-271F5FB8CB53}"/>
               </a:ext>
             </a:extLst>
           </p:cNvPr>
@@ -13452,7 +13460,7 @@
           <p:cNvPr id="9" name="">
             <a:extLst xmlns:a="http://schemas.openxmlformats.org/drawingml/2006/main">
               <a:ext uri="{FF2B5EF4-FFF2-40B4-BE49-F238E27FC236}">
-                <a16:creationId xmlns:a16="http://schemas.microsoft.com/office/drawing/2014/main" id="{F558492A-E9EB-475C-BF85-D3B2EE76CF9B}"/>
+                <a16:creationId xmlns:a16="http://schemas.microsoft.com/office/drawing/2014/main" id="{18C38E1A-56BC-4D7E-A523-D99E58AF752A}"/>
               </a:ext>
             </a:extLst>
           </p:cNvPr>
@@ -13509,7 +13517,7 @@
           <p:cNvPr id="10" name="">
             <a:extLst xmlns:a="http://schemas.openxmlformats.org/drawingml/2006/main">
               <a:ext uri="{FF2B5EF4-FFF2-40B4-BE49-F238E27FC236}">
-                <a16:creationId xmlns:a16="http://schemas.microsoft.com/office/drawing/2014/main" id="{F8A1F9F9-42D5-4731-B85B-0124F81A9B9B}"/>
+                <a16:creationId xmlns:a16="http://schemas.microsoft.com/office/drawing/2014/main" id="{CC3603B5-8AEE-4E56-945F-B67B226784A0}"/>
               </a:ext>
             </a:extLst>
           </p:cNvPr>
@@ -13543,7 +13551,7 @@
           <p:cNvPr id="11" name="">
             <a:extLst xmlns:a="http://schemas.openxmlformats.org/drawingml/2006/main">
               <a:ext uri="{FF2B5EF4-FFF2-40B4-BE49-F238E27FC236}">
-                <a16:creationId xmlns:a16="http://schemas.microsoft.com/office/drawing/2014/main" id="{8A33644C-BA2D-4913-B62E-4FC464CDDC51}"/>
+                <a16:creationId xmlns:a16="http://schemas.microsoft.com/office/drawing/2014/main" id="{CB543DF7-1CE3-410B-9762-45AA3A815C7C}"/>
               </a:ext>
             </a:extLst>
           </p:cNvPr>
@@ -13575,7 +13583,7 @@
           <p:cNvPr id="12" name="">
             <a:extLst xmlns:a="http://schemas.openxmlformats.org/drawingml/2006/main">
               <a:ext uri="{FF2B5EF4-FFF2-40B4-BE49-F238E27FC236}">
-                <a16:creationId xmlns:a16="http://schemas.microsoft.com/office/drawing/2014/main" id="{6D84DAC0-24BC-4F05-B262-1481F7D3D598}"/>
+                <a16:creationId xmlns:a16="http://schemas.microsoft.com/office/drawing/2014/main" id="{7529A329-B21D-413B-8670-9A2912362AE9}"/>
               </a:ext>
             </a:extLst>
           </p:cNvPr>
@@ -13632,7 +13640,7 @@
           <p:cNvPr id="13" name="">
             <a:extLst xmlns:a="http://schemas.openxmlformats.org/drawingml/2006/main">
               <a:ext uri="{FF2B5EF4-FFF2-40B4-BE49-F238E27FC236}">
-                <a16:creationId xmlns:a16="http://schemas.microsoft.com/office/drawing/2014/main" id="{ADB4FEE7-8829-4098-9F38-BC0763F3C2D6}"/>
+                <a16:creationId xmlns:a16="http://schemas.microsoft.com/office/drawing/2014/main" id="{7F357AA9-4899-4395-BA57-0DBACDAA9270}"/>
               </a:ext>
             </a:extLst>
           </p:cNvPr>
@@ -13689,7 +13697,7 @@
           <p:cNvPr id="14" name="">
             <a:extLst xmlns:a="http://schemas.openxmlformats.org/drawingml/2006/main">
               <a:ext uri="{FF2B5EF4-FFF2-40B4-BE49-F238E27FC236}">
-                <a16:creationId xmlns:a16="http://schemas.microsoft.com/office/drawing/2014/main" id="{7996E191-9105-40A5-A4E6-B8EEFF1D832D}"/>
+                <a16:creationId xmlns:a16="http://schemas.microsoft.com/office/drawing/2014/main" id="{BFD97AAB-A91F-4B4F-8723-6D54AEB9AA5E}"/>
               </a:ext>
             </a:extLst>
           </p:cNvPr>
@@ -13723,7 +13731,7 @@
           <p:cNvPr id="15" name="">
             <a:extLst xmlns:a="http://schemas.openxmlformats.org/drawingml/2006/main">
               <a:ext uri="{FF2B5EF4-FFF2-40B4-BE49-F238E27FC236}">
-                <a16:creationId xmlns:a16="http://schemas.microsoft.com/office/drawing/2014/main" id="{F9AE8B17-957D-4107-A7F8-A9849FAB0D39}"/>
+                <a16:creationId xmlns:a16="http://schemas.microsoft.com/office/drawing/2014/main" id="{E46E2E1D-FADD-4E4B-949B-5C505EE3C160}"/>
               </a:ext>
             </a:extLst>
           </p:cNvPr>
@@ -13755,7 +13763,7 @@
           <p:cNvPr id="16" name="">
             <a:extLst xmlns:a="http://schemas.openxmlformats.org/drawingml/2006/main">
               <a:ext uri="{FF2B5EF4-FFF2-40B4-BE49-F238E27FC236}">
-                <a16:creationId xmlns:a16="http://schemas.microsoft.com/office/drawing/2014/main" id="{2E57181A-0A0D-4CE3-B2FB-D2CA7C18903C}"/>
+                <a16:creationId xmlns:a16="http://schemas.microsoft.com/office/drawing/2014/main" id="{FEE9A4EF-0355-4ACE-9DD3-E745C7995E5F}"/>
               </a:ext>
             </a:extLst>
           </p:cNvPr>
@@ -13812,7 +13820,7 @@
           <p:cNvPr id="17" name="">
             <a:extLst xmlns:a="http://schemas.openxmlformats.org/drawingml/2006/main">
               <a:ext uri="{FF2B5EF4-FFF2-40B4-BE49-F238E27FC236}">
-                <a16:creationId xmlns:a16="http://schemas.microsoft.com/office/drawing/2014/main" id="{FC92A935-3463-4DB6-A689-572DC7879921}"/>
+                <a16:creationId xmlns:a16="http://schemas.microsoft.com/office/drawing/2014/main" id="{EEB9D093-A834-4D9B-AA85-7F19C2E8868C}"/>
               </a:ext>
             </a:extLst>
           </p:cNvPr>
@@ -13869,7 +13877,7 @@
           <p:cNvPr id="18" name="">
             <a:extLst xmlns:a="http://schemas.openxmlformats.org/drawingml/2006/main">
               <a:ext uri="{FF2B5EF4-FFF2-40B4-BE49-F238E27FC236}">
-                <a16:creationId xmlns:a16="http://schemas.microsoft.com/office/drawing/2014/main" id="{889EF79E-3D91-4464-A765-D5493260EB43}"/>
+                <a16:creationId xmlns:a16="http://schemas.microsoft.com/office/drawing/2014/main" id="{A8343F06-91F1-45B2-8074-D82520C167B1}"/>
               </a:ext>
             </a:extLst>
           </p:cNvPr>
@@ -13903,7 +13911,7 @@
           <p:cNvPr id="19" name="">
             <a:extLst xmlns:a="http://schemas.openxmlformats.org/drawingml/2006/main">
               <a:ext uri="{FF2B5EF4-FFF2-40B4-BE49-F238E27FC236}">
-                <a16:creationId xmlns:a16="http://schemas.microsoft.com/office/drawing/2014/main" id="{4C7DF7BF-ECF5-4F40-9DDF-272564C8407E}"/>
+                <a16:creationId xmlns:a16="http://schemas.microsoft.com/office/drawing/2014/main" id="{7D59EBBE-BD1C-462B-AB0B-6FE767D9A697}"/>
               </a:ext>
             </a:extLst>
           </p:cNvPr>
@@ -13935,7 +13943,7 @@
           <p:cNvPr id="20" name="">
             <a:extLst xmlns:a="http://schemas.openxmlformats.org/drawingml/2006/main">
               <a:ext uri="{FF2B5EF4-FFF2-40B4-BE49-F238E27FC236}">
-                <a16:creationId xmlns:a16="http://schemas.microsoft.com/office/drawing/2014/main" id="{BF1980F2-B583-4E41-BB59-9E70E00501E0}"/>
+                <a16:creationId xmlns:a16="http://schemas.microsoft.com/office/drawing/2014/main" id="{75201A72-48ED-4119-8DA7-A88143650CF9}"/>
               </a:ext>
             </a:extLst>
           </p:cNvPr>
@@ -13992,7 +14000,7 @@
           <p:cNvPr id="21" name="">
             <a:extLst xmlns:a="http://schemas.openxmlformats.org/drawingml/2006/main">
               <a:ext uri="{FF2B5EF4-FFF2-40B4-BE49-F238E27FC236}">
-                <a16:creationId xmlns:a16="http://schemas.microsoft.com/office/drawing/2014/main" id="{E26834DB-6B21-4073-8D7C-BBD832232228}"/>
+                <a16:creationId xmlns:a16="http://schemas.microsoft.com/office/drawing/2014/main" id="{A207D703-6CF5-4820-A113-ECD198090BDA}"/>
               </a:ext>
             </a:extLst>
           </p:cNvPr>
@@ -14047,7 +14055,7 @@
     </p:spTree>
     <p:extLst>
       <p:ext uri="{BB962C8B-B14F-4D97-AF65-F5344CB8AC3E}">
-        <p14:creationId xmlns:p14="http://schemas.microsoft.com/office/powerpoint/2010/main" val="914268896"/>
+        <p14:creationId xmlns:p14="http://schemas.microsoft.com/office/powerpoint/2010/main" val="1464323552"/>
       </p:ext>
     </p:extLst>
   </p:cSld>
